--- a/Workshop_Proposal_AI_Programming.pptx
+++ b/Workshop_Proposal_AI_Programming.pptx
@@ -22,8 +22,8 @@
     <p:sldId id="264" r:id="rId13"/>
     <p:sldId id="266" r:id="rId14"/>
     <p:sldId id="267" r:id="rId15"/>
-    <p:sldId id="268" r:id="rId16"/>
-    <p:sldId id="269" r:id="rId17"/>
+    <p:sldId id="281" r:id="rId16"/>
+    <p:sldId id="268" r:id="rId17"/>
     <p:sldId id="270" r:id="rId18"/>
     <p:sldId id="271" r:id="rId19"/>
     <p:sldId id="272" r:id="rId20"/>
@@ -902,7 +902,7 @@
           <a:p>
             <a:fld id="{F7021451-1387-4CA6-816F-3879F97B5CBC}" type="slidenum">
               <a:rPr lang="en-US"/>
-              <a:t>15</a:t>
+              <a:t>16</a:t>
             </a:fld>
             <a:endParaRPr lang="en-US"/>
           </a:p>
@@ -993,7 +993,7 @@
           <a:p>
             <a:fld id="{F7021451-1387-4CA6-816F-3879F97B5CBC}" type="slidenum">
               <a:rPr lang="en-US"/>
-              <a:t>16</a:t>
+              <a:t>17</a:t>
             </a:fld>
             <a:endParaRPr lang="en-US"/>
           </a:p>
@@ -1084,7 +1084,7 @@
           <a:p>
             <a:fld id="{F7021451-1387-4CA6-816F-3879F97B5CBC}" type="slidenum">
               <a:rPr lang="en-US"/>
-              <a:t>17</a:t>
+              <a:t>18</a:t>
             </a:fld>
             <a:endParaRPr lang="en-US"/>
           </a:p>
@@ -1175,7 +1175,7 @@
           <a:p>
             <a:fld id="{F7021451-1387-4CA6-816F-3879F97B5CBC}" type="slidenum">
               <a:rPr lang="en-US"/>
-              <a:t>18</a:t>
+              <a:t>19</a:t>
             </a:fld>
             <a:endParaRPr lang="en-US"/>
           </a:p>
@@ -1199,7 +1199,13 @@
   <p:cSld>
     <p:spTree>
       <p:nvGrpSpPr>
-        <p:cNvPr id="1" name=""/>
+        <p:cNvPr id="1" name="">
+          <a:extLst>
+            <a:ext uri="{FF2B5EF4-FFF2-40B4-BE49-F238E27FC236}">
+              <a16:creationId xmlns:a16="http://schemas.microsoft.com/office/drawing/2014/main" id="{9D71200B-4968-F49B-AC06-488A8E62312E}"/>
+            </a:ext>
+          </a:extLst>
+        </p:cNvPr>
         <p:cNvGrpSpPr/>
         <p:nvPr/>
       </p:nvGrpSpPr>
@@ -1213,7 +1219,13 @@
       </p:grpSpPr>
       <p:sp>
         <p:nvSpPr>
-          <p:cNvPr id="2" name="Slide Image Placeholder 1"/>
+          <p:cNvPr id="2" name="Slide Image Placeholder 1">
+            <a:extLst>
+              <a:ext uri="{FF2B5EF4-FFF2-40B4-BE49-F238E27FC236}">
+                <a16:creationId xmlns:a16="http://schemas.microsoft.com/office/drawing/2014/main" id="{C1E7B741-1380-8BEE-FA11-5A9CC635A675}"/>
+              </a:ext>
+            </a:extLst>
+          </p:cNvPr>
           <p:cNvSpPr>
             <a:spLocks noGrp="1" noRot="1" noChangeAspect="1"/>
           </p:cNvSpPr>
@@ -1232,7 +1244,13 @@
       </p:sp>
       <p:sp>
         <p:nvSpPr>
-          <p:cNvPr id="3" name="Notes Placeholder 2"/>
+          <p:cNvPr id="3" name="Notes Placeholder 2">
+            <a:extLst>
+              <a:ext uri="{FF2B5EF4-FFF2-40B4-BE49-F238E27FC236}">
+                <a16:creationId xmlns:a16="http://schemas.microsoft.com/office/drawing/2014/main" id="{D85458DC-0E09-6152-25B2-03AAC49800D8}"/>
+              </a:ext>
+            </a:extLst>
+          </p:cNvPr>
           <p:cNvSpPr>
             <a:spLocks noGrp="1"/>
           </p:cNvSpPr>
@@ -1251,7 +1269,13 @@
       </p:sp>
       <p:sp>
         <p:nvSpPr>
-          <p:cNvPr id="4" name="Slide Number Placeholder 3"/>
+          <p:cNvPr id="4" name="Slide Number Placeholder 3">
+            <a:extLst>
+              <a:ext uri="{FF2B5EF4-FFF2-40B4-BE49-F238E27FC236}">
+                <a16:creationId xmlns:a16="http://schemas.microsoft.com/office/drawing/2014/main" id="{C23BE948-FD67-6123-06D1-9F038793B01E}"/>
+              </a:ext>
+            </a:extLst>
+          </p:cNvPr>
           <p:cNvSpPr>
             <a:spLocks noGrp="1"/>
           </p:cNvSpPr>
@@ -1266,7 +1290,7 @@
           <a:p>
             <a:fld id="{F7021451-1387-4CA6-816F-3879F97B5CBC}" type="slidenum">
               <a:rPr lang="en-US"/>
-              <a:t>19</a:t>
+              <a:t>20</a:t>
             </a:fld>
             <a:endParaRPr lang="en-US"/>
           </a:p>
@@ -1275,7 +1299,7 @@
     </p:spTree>
     <p:extLst>
       <p:ext uri="{BB962C8B-B14F-4D97-AF65-F5344CB8AC3E}">
-        <p14:creationId xmlns:p14="http://schemas.microsoft.com/office/powerpoint/2010/main" val="1024086991"/>
+        <p14:creationId xmlns:p14="http://schemas.microsoft.com/office/powerpoint/2010/main" val="2034600512"/>
       </p:ext>
     </p:extLst>
   </p:cSld>
@@ -1391,121 +1415,6 @@
     <p:extLst>
       <p:ext uri="{BB962C8B-B14F-4D97-AF65-F5344CB8AC3E}">
         <p14:creationId xmlns:p14="http://schemas.microsoft.com/office/powerpoint/2010/main" val="2943012812"/>
-      </p:ext>
-    </p:extLst>
-  </p:cSld>
-  <p:clrMapOvr>
-    <a:masterClrMapping/>
-  </p:clrMapOvr>
-</p:notes>
-</file>
-
-<file path=ppt/notesSlides/notesSlide20.xml><?xml version="1.0" encoding="utf-8"?>
-<p:notes xmlns:a="http://schemas.openxmlformats.org/drawingml/2006/main" xmlns:r="http://schemas.openxmlformats.org/officeDocument/2006/relationships" xmlns:p="http://schemas.openxmlformats.org/presentationml/2006/main">
-  <p:cSld>
-    <p:spTree>
-      <p:nvGrpSpPr>
-        <p:cNvPr id="1" name="">
-          <a:extLst>
-            <a:ext uri="{FF2B5EF4-FFF2-40B4-BE49-F238E27FC236}">
-              <a16:creationId xmlns:a16="http://schemas.microsoft.com/office/drawing/2014/main" id="{9D71200B-4968-F49B-AC06-488A8E62312E}"/>
-            </a:ext>
-          </a:extLst>
-        </p:cNvPr>
-        <p:cNvGrpSpPr/>
-        <p:nvPr/>
-      </p:nvGrpSpPr>
-      <p:grpSpPr>
-        <a:xfrm>
-          <a:off x="0" y="0"/>
-          <a:ext cx="0" cy="0"/>
-          <a:chOff x="0" y="0"/>
-          <a:chExt cx="0" cy="0"/>
-        </a:xfrm>
-      </p:grpSpPr>
-      <p:sp>
-        <p:nvSpPr>
-          <p:cNvPr id="2" name="Slide Image Placeholder 1">
-            <a:extLst>
-              <a:ext uri="{FF2B5EF4-FFF2-40B4-BE49-F238E27FC236}">
-                <a16:creationId xmlns:a16="http://schemas.microsoft.com/office/drawing/2014/main" id="{C1E7B741-1380-8BEE-FA11-5A9CC635A675}"/>
-              </a:ext>
-            </a:extLst>
-          </p:cNvPr>
-          <p:cNvSpPr>
-            <a:spLocks noGrp="1" noRot="1" noChangeAspect="1"/>
-          </p:cNvSpPr>
-          <p:nvPr>
-            <p:ph type="sldImg"/>
-          </p:nvPr>
-        </p:nvSpPr>
-        <p:spPr/>
-        <p:txBody>
-          <a:bodyPr/>
-          <a:lstStyle/>
-          <a:p>
-            <a:endParaRPr lang="en-US"/>
-          </a:p>
-        </p:txBody>
-      </p:sp>
-      <p:sp>
-        <p:nvSpPr>
-          <p:cNvPr id="3" name="Notes Placeholder 2">
-            <a:extLst>
-              <a:ext uri="{FF2B5EF4-FFF2-40B4-BE49-F238E27FC236}">
-                <a16:creationId xmlns:a16="http://schemas.microsoft.com/office/drawing/2014/main" id="{D85458DC-0E09-6152-25B2-03AAC49800D8}"/>
-              </a:ext>
-            </a:extLst>
-          </p:cNvPr>
-          <p:cNvSpPr>
-            <a:spLocks noGrp="1"/>
-          </p:cNvSpPr>
-          <p:nvPr>
-            <p:ph type="body" idx="1"/>
-          </p:nvPr>
-        </p:nvSpPr>
-        <p:spPr/>
-        <p:txBody>
-          <a:bodyPr/>
-          <a:lstStyle/>
-          <a:p>
-            <a:endParaRPr lang="en-US" dirty="0"/>
-          </a:p>
-        </p:txBody>
-      </p:sp>
-      <p:sp>
-        <p:nvSpPr>
-          <p:cNvPr id="4" name="Slide Number Placeholder 3">
-            <a:extLst>
-              <a:ext uri="{FF2B5EF4-FFF2-40B4-BE49-F238E27FC236}">
-                <a16:creationId xmlns:a16="http://schemas.microsoft.com/office/drawing/2014/main" id="{C23BE948-FD67-6123-06D1-9F038793B01E}"/>
-              </a:ext>
-            </a:extLst>
-          </p:cNvPr>
-          <p:cNvSpPr>
-            <a:spLocks noGrp="1"/>
-          </p:cNvSpPr>
-          <p:nvPr>
-            <p:ph type="sldNum" sz="quarter" idx="10"/>
-          </p:nvPr>
-        </p:nvSpPr>
-        <p:spPr/>
-        <p:txBody>
-          <a:bodyPr/>
-          <a:lstStyle/>
-          <a:p>
-            <a:fld id="{F7021451-1387-4CA6-816F-3879F97B5CBC}" type="slidenum">
-              <a:rPr lang="en-US"/>
-              <a:t>20</a:t>
-            </a:fld>
-            <a:endParaRPr lang="en-US"/>
-          </a:p>
-        </p:txBody>
-      </p:sp>
-    </p:spTree>
-    <p:extLst>
-      <p:ext uri="{BB962C8B-B14F-4D97-AF65-F5344CB8AC3E}">
-        <p14:creationId xmlns:p14="http://schemas.microsoft.com/office/powerpoint/2010/main" val="2034600512"/>
       </p:ext>
     </p:extLst>
   </p:cSld>
@@ -5459,7 +5368,7 @@
                 <a:ea typeface="Tahoma" pitchFamily="34" charset="-122"/>
                 <a:cs typeface="Tahoma" pitchFamily="34" charset="-120"/>
               </a:rPr>
-              <a:t>Programming for Fun (Node.js)</a:t>
+              <a:t>Programming for Fun (TypeScript)</a:t>
             </a:r>
             <a:endParaRPr lang="en-US" sz="3400" dirty="0"/>
           </a:p>
@@ -7933,6 +7842,1116 @@
 
 <file path=ppt/slides/slide15.xml><?xml version="1.0" encoding="utf-8"?>
 <p:sld xmlns:a="http://schemas.openxmlformats.org/drawingml/2006/main" xmlns:r="http://schemas.openxmlformats.org/officeDocument/2006/relationships" xmlns:p="http://schemas.openxmlformats.org/presentationml/2006/main">
+  <p:cSld name="Slide 7">
+    <p:bg>
+      <p:bgPr>
+        <a:solidFill>
+          <a:srgbClr val="0B0E14"/>
+        </a:solidFill>
+        <a:effectLst/>
+      </p:bgPr>
+    </p:bg>
+    <p:spTree>
+      <p:nvGrpSpPr>
+        <p:cNvPr id="1" name=""/>
+        <p:cNvGrpSpPr/>
+        <p:nvPr/>
+      </p:nvGrpSpPr>
+      <p:grpSpPr>
+        <a:xfrm>
+          <a:off x="0" y="0"/>
+          <a:ext cx="0" cy="0"/>
+          <a:chOff x="0" y="0"/>
+          <a:chExt cx="0" cy="0"/>
+        </a:xfrm>
+      </p:grpSpPr>
+      <p:sp>
+        <p:nvSpPr>
+          <p:cNvPr id="2" name="Text 0"/>
+          <p:cNvSpPr/>
+          <p:nvPr/>
+        </p:nvSpPr>
+        <p:spPr>
+          <a:xfrm>
+            <a:off x="548640" y="320040"/>
+            <a:ext cx="8778240" cy="502920"/>
+          </a:xfrm>
+          <a:prstGeom prst="rect">
+            <a:avLst/>
+          </a:prstGeom>
+          <a:noFill/>
+          <a:ln/>
+        </p:spPr>
+        <p:txBody>
+          <a:bodyPr wrap="square" rtlCol="0" anchor="ctr"/>
+          <a:lstStyle/>
+          <a:p>
+            <a:pPr marL="0" indent="0">
+              <a:buNone/>
+            </a:pPr>
+            <a:r>
+              <a:rPr lang="en-US" sz="2300" b="1" dirty="0">
+                <a:solidFill>
+                  <a:srgbClr val="FFFFFF"/>
+                </a:solidFill>
+                <a:latin typeface="Tahoma" pitchFamily="34" charset="0"/>
+                <a:ea typeface="Tahoma" pitchFamily="34" charset="-122"/>
+                <a:cs typeface="Tahoma" pitchFamily="34" charset="-120"/>
+              </a:rPr>
+              <a:t>ติดตั้ง TypeScript (ts-node)</a:t>
+            </a:r>
+            <a:endParaRPr lang="en-US" sz="2300" dirty="0"/>
+          </a:p>
+        </p:txBody>
+      </p:sp>
+      <p:sp>
+        <p:nvSpPr>
+          <p:cNvPr id="3" name="Shape 1"/>
+          <p:cNvSpPr/>
+          <p:nvPr/>
+        </p:nvSpPr>
+        <p:spPr>
+          <a:xfrm>
+            <a:off x="10104120" y="365760"/>
+            <a:ext cx="1508760" cy="384048"/>
+          </a:xfrm>
+          <a:prstGeom prst="roundRect">
+            <a:avLst>
+              <a:gd name="adj" fmla="val 50000"/>
+            </a:avLst>
+          </a:prstGeom>
+          <a:solidFill>
+            <a:srgbClr val="E8A33D"/>
+          </a:solidFill>
+          <a:ln w="12700">
+            <a:solidFill>
+              <a:srgbClr val="E8A33D"/>
+            </a:solidFill>
+            <a:prstDash val="solid"/>
+          </a:ln>
+        </p:spPr>
+        <p:txBody>
+          <a:bodyPr/>
+          <a:lstStyle/>
+          <a:p>
+            <a:endParaRPr lang="en-US"/>
+          </a:p>
+        </p:txBody>
+      </p:sp>
+      <p:sp>
+        <p:nvSpPr>
+          <p:cNvPr id="4" name="Text 2"/>
+          <p:cNvSpPr/>
+          <p:nvPr/>
+        </p:nvSpPr>
+        <p:spPr>
+          <a:xfrm>
+            <a:off x="10104120" y="365760"/>
+            <a:ext cx="1508760" cy="384048"/>
+          </a:xfrm>
+          <a:prstGeom prst="rect">
+            <a:avLst/>
+          </a:prstGeom>
+          <a:noFill/>
+          <a:ln/>
+        </p:spPr>
+        <p:txBody>
+          <a:bodyPr wrap="square" rtlCol="0" anchor="ctr"/>
+          <a:lstStyle/>
+          <a:p>
+            <a:pPr marL="0" indent="0" algn="ctr">
+              <a:buNone/>
+            </a:pPr>
+            <a:r>
+              <a:rPr lang="en-US" sz="1050" b="1" kern="0" spc="120" dirty="0">
+                <a:solidFill>
+                  <a:srgbClr val="0B0E14"/>
+                </a:solidFill>
+                <a:latin typeface="Courier New" pitchFamily="34" charset="0"/>
+                <a:ea typeface="Courier New" pitchFamily="34" charset="-122"/>
+                <a:cs typeface="Courier New" pitchFamily="34" charset="-120"/>
+              </a:rPr>
+              <a:t>8 นาที</a:t>
+            </a:r>
+            <a:endParaRPr lang="en-US" sz="1050" dirty="0"/>
+          </a:p>
+        </p:txBody>
+      </p:sp>
+      <p:sp>
+        <p:nvSpPr>
+          <p:cNvPr id="5" name="Shape 3"/>
+          <p:cNvSpPr/>
+          <p:nvPr/>
+        </p:nvSpPr>
+        <p:spPr>
+          <a:xfrm>
+            <a:off x="548640" y="1298448"/>
+            <a:ext cx="11064240" cy="0"/>
+          </a:xfrm>
+          <a:prstGeom prst="line">
+            <a:avLst/>
+          </a:prstGeom>
+          <a:noFill/>
+          <a:ln w="12700">
+            <a:solidFill>
+              <a:srgbClr val="262C3B"/>
+            </a:solidFill>
+            <a:prstDash val="solid"/>
+          </a:ln>
+        </p:spPr>
+        <p:txBody>
+          <a:bodyPr/>
+          <a:lstStyle/>
+          <a:p>
+            <a:endParaRPr lang="en-US"/>
+          </a:p>
+        </p:txBody>
+      </p:sp>
+      <p:sp>
+        <p:nvSpPr>
+          <p:cNvPr id="6" name="Text 4"/>
+          <p:cNvSpPr/>
+          <p:nvPr/>
+        </p:nvSpPr>
+        <p:spPr>
+          <a:xfrm>
+            <a:off x="548640" y="1389888"/>
+            <a:ext cx="5486400" cy="292608"/>
+          </a:xfrm>
+          <a:prstGeom prst="rect">
+            <a:avLst/>
+          </a:prstGeom>
+          <a:noFill/>
+          <a:ln/>
+        </p:spPr>
+        <p:txBody>
+          <a:bodyPr wrap="square" rtlCol="0" anchor="ctr"/>
+          <a:lstStyle/>
+          <a:p>
+            <a:pPr marL="0" indent="0">
+              <a:buNone/>
+            </a:pPr>
+            <a:r>
+              <a:rPr lang="en-US" sz="1100" dirty="0">
+                <a:solidFill>
+                  <a:srgbClr val="8B93A7"/>
+                </a:solidFill>
+                <a:latin typeface="Courier New" pitchFamily="34" charset="0"/>
+                <a:ea typeface="Courier New" pitchFamily="34" charset="-122"/>
+                <a:cs typeface="Courier New" pitchFamily="34" charset="-120"/>
+              </a:rPr>
+              <a:t>ขั้นตอนที่ 4 / 8</a:t>
+            </a:r>
+            <a:endParaRPr lang="en-US" sz="1100" dirty="0"/>
+          </a:p>
+        </p:txBody>
+      </p:sp>
+      <p:sp>
+        <p:nvSpPr>
+          <p:cNvPr id="7" name="Shape 5"/>
+          <p:cNvSpPr/>
+          <p:nvPr/>
+        </p:nvSpPr>
+        <p:spPr>
+          <a:xfrm>
+            <a:off x="548640" y="1783080"/>
+            <a:ext cx="347472" cy="347472"/>
+          </a:xfrm>
+          <a:prstGeom prst="ellipse">
+            <a:avLst/>
+          </a:prstGeom>
+          <a:solidFill>
+            <a:srgbClr val="E8A33D"/>
+          </a:solidFill>
+          <a:ln/>
+        </p:spPr>
+        <p:txBody>
+          <a:bodyPr/>
+          <a:lstStyle/>
+          <a:p>
+            <a:endParaRPr lang="en-US"/>
+          </a:p>
+        </p:txBody>
+      </p:sp>
+      <p:sp>
+        <p:nvSpPr>
+          <p:cNvPr id="8" name="Text 6"/>
+          <p:cNvSpPr/>
+          <p:nvPr/>
+        </p:nvSpPr>
+        <p:spPr>
+          <a:xfrm>
+            <a:off x="548640" y="1783080"/>
+            <a:ext cx="347472" cy="347472"/>
+          </a:xfrm>
+          <a:prstGeom prst="rect">
+            <a:avLst/>
+          </a:prstGeom>
+          <a:noFill/>
+          <a:ln/>
+        </p:spPr>
+        <p:txBody>
+          <a:bodyPr wrap="square" rtlCol="0" anchor="ctr"/>
+          <a:lstStyle/>
+          <a:p>
+            <a:pPr marL="0" indent="0" algn="ctr">
+              <a:buNone/>
+            </a:pPr>
+            <a:r>
+              <a:rPr lang="en-US" sz="912" b="1" dirty="0">
+                <a:solidFill>
+                  <a:srgbClr val="0B0E14"/>
+                </a:solidFill>
+                <a:latin typeface="Tahoma" pitchFamily="34" charset="0"/>
+                <a:ea typeface="Tahoma" pitchFamily="34" charset="-122"/>
+                <a:cs typeface="Tahoma" pitchFamily="34" charset="-120"/>
+              </a:rPr>
+              <a:t>1</a:t>
+            </a:r>
+            <a:endParaRPr lang="en-US" sz="912" dirty="0"/>
+          </a:p>
+        </p:txBody>
+      </p:sp>
+      <p:sp>
+        <p:nvSpPr>
+          <p:cNvPr id="9" name="Text 7"/>
+          <p:cNvSpPr/>
+          <p:nvPr/>
+        </p:nvSpPr>
+        <p:spPr>
+          <a:xfrm>
+            <a:off x="1005840" y="1728216"/>
+            <a:ext cx="4892040" cy="756285"/>
+          </a:xfrm>
+          <a:prstGeom prst="rect">
+            <a:avLst/>
+          </a:prstGeom>
+          <a:noFill/>
+          <a:ln/>
+        </p:spPr>
+        <p:txBody>
+          <a:bodyPr wrap="square" rtlCol="0" anchor="t"/>
+          <a:lstStyle/>
+          <a:p>
+            <a:pPr marL="0" indent="0">
+              <a:buNone/>
+            </a:pPr>
+            <a:r>
+              <a:rPr lang="en-US" sz="1250" dirty="0">
+                <a:solidFill>
+                  <a:srgbClr val="C7CCD9"/>
+                </a:solidFill>
+                <a:latin typeface="Tahoma" pitchFamily="34" charset="0"/>
+                <a:ea typeface="Tahoma" pitchFamily="34" charset="-122"/>
+                <a:cs typeface="Tahoma" pitchFamily="34" charset="-120"/>
+              </a:rPr>
+              <a:t>เปิด Command Prompt (cmd) แล้วตรวจสอบว่ามี Node.js อยู่แล้วด้วยคำสั่ง node -v</a:t>
+            </a:r>
+            <a:endParaRPr lang="en-US" sz="1250" dirty="0"/>
+          </a:p>
+        </p:txBody>
+      </p:sp>
+      <p:sp>
+        <p:nvSpPr>
+          <p:cNvPr id="10" name="Shape 8"/>
+          <p:cNvSpPr/>
+          <p:nvPr/>
+        </p:nvSpPr>
+        <p:spPr>
+          <a:xfrm>
+            <a:off x="548640" y="2585085"/>
+            <a:ext cx="347472" cy="347472"/>
+          </a:xfrm>
+          <a:prstGeom prst="ellipse">
+            <a:avLst/>
+          </a:prstGeom>
+          <a:solidFill>
+            <a:srgbClr val="2FB88F"/>
+          </a:solidFill>
+          <a:ln/>
+        </p:spPr>
+        <p:txBody>
+          <a:bodyPr/>
+          <a:lstStyle/>
+          <a:p>
+            <a:endParaRPr lang="en-US"/>
+          </a:p>
+        </p:txBody>
+      </p:sp>
+      <p:sp>
+        <p:nvSpPr>
+          <p:cNvPr id="11" name="Text 9"/>
+          <p:cNvSpPr/>
+          <p:nvPr/>
+        </p:nvSpPr>
+        <p:spPr>
+          <a:xfrm>
+            <a:off x="548640" y="2585085"/>
+            <a:ext cx="347472" cy="347472"/>
+          </a:xfrm>
+          <a:prstGeom prst="rect">
+            <a:avLst/>
+          </a:prstGeom>
+          <a:noFill/>
+          <a:ln/>
+        </p:spPr>
+        <p:txBody>
+          <a:bodyPr wrap="square" rtlCol="0" anchor="ctr"/>
+          <a:lstStyle/>
+          <a:p>
+            <a:pPr marL="0" indent="0" algn="ctr">
+              <a:buNone/>
+            </a:pPr>
+            <a:r>
+              <a:rPr lang="en-US" sz="912" b="1" dirty="0">
+                <a:solidFill>
+                  <a:srgbClr val="0B0E14"/>
+                </a:solidFill>
+                <a:latin typeface="Tahoma" pitchFamily="34" charset="0"/>
+                <a:ea typeface="Tahoma" pitchFamily="34" charset="-122"/>
+                <a:cs typeface="Tahoma" pitchFamily="34" charset="-120"/>
+              </a:rPr>
+              <a:t>2</a:t>
+            </a:r>
+            <a:endParaRPr lang="en-US" sz="912" dirty="0"/>
+          </a:p>
+        </p:txBody>
+      </p:sp>
+      <p:sp>
+        <p:nvSpPr>
+          <p:cNvPr id="12" name="Text 10"/>
+          <p:cNvSpPr/>
+          <p:nvPr/>
+        </p:nvSpPr>
+        <p:spPr>
+          <a:xfrm>
+            <a:off x="1005840" y="2530221"/>
+            <a:ext cx="4892040" cy="756285"/>
+          </a:xfrm>
+          <a:prstGeom prst="rect">
+            <a:avLst/>
+          </a:prstGeom>
+          <a:noFill/>
+          <a:ln/>
+        </p:spPr>
+        <p:txBody>
+          <a:bodyPr wrap="square" rtlCol="0" anchor="t"/>
+          <a:lstStyle/>
+          <a:p>
+            <a:pPr marL="0" indent="0">
+              <a:buNone/>
+            </a:pPr>
+            <a:r>
+              <a:rPr lang="en-US" sz="1250" dirty="0">
+                <a:solidFill>
+                  <a:srgbClr val="C7CCD9"/>
+                </a:solidFill>
+                <a:latin typeface="Tahoma" pitchFamily="34" charset="0"/>
+                <a:ea typeface="Tahoma" pitchFamily="34" charset="-122"/>
+                <a:cs typeface="Tahoma" pitchFamily="34" charset="-120"/>
+              </a:rPr>
+              <a:t>พิมพ์คำสั่ง npm install -g typescript ts-node แล้วกด Enter เพื่อติดตั้ง</a:t>
+            </a:r>
+            <a:endParaRPr lang="en-US" sz="1250" dirty="0"/>
+          </a:p>
+        </p:txBody>
+      </p:sp>
+      <p:sp>
+        <p:nvSpPr>
+          <p:cNvPr id="13" name="Shape 11"/>
+          <p:cNvSpPr/>
+          <p:nvPr/>
+        </p:nvSpPr>
+        <p:spPr>
+          <a:xfrm>
+            <a:off x="548640" y="3387090"/>
+            <a:ext cx="347472" cy="347472"/>
+          </a:xfrm>
+          <a:prstGeom prst="ellipse">
+            <a:avLst/>
+          </a:prstGeom>
+          <a:solidFill>
+            <a:srgbClr val="E8A33D"/>
+          </a:solidFill>
+          <a:ln/>
+        </p:spPr>
+        <p:txBody>
+          <a:bodyPr/>
+          <a:lstStyle/>
+          <a:p>
+            <a:endParaRPr lang="en-US"/>
+          </a:p>
+        </p:txBody>
+      </p:sp>
+      <p:sp>
+        <p:nvSpPr>
+          <p:cNvPr id="14" name="Text 12"/>
+          <p:cNvSpPr/>
+          <p:nvPr/>
+        </p:nvSpPr>
+        <p:spPr>
+          <a:xfrm>
+            <a:off x="548640" y="3387090"/>
+            <a:ext cx="347472" cy="347472"/>
+          </a:xfrm>
+          <a:prstGeom prst="rect">
+            <a:avLst/>
+          </a:prstGeom>
+          <a:noFill/>
+          <a:ln/>
+        </p:spPr>
+        <p:txBody>
+          <a:bodyPr wrap="square" rtlCol="0" anchor="ctr"/>
+          <a:lstStyle/>
+          <a:p>
+            <a:pPr marL="0" indent="0" algn="ctr">
+              <a:buNone/>
+            </a:pPr>
+            <a:r>
+              <a:rPr lang="en-US" sz="912" b="1" dirty="0">
+                <a:solidFill>
+                  <a:srgbClr val="0B0E14"/>
+                </a:solidFill>
+                <a:latin typeface="Tahoma" pitchFamily="34" charset="0"/>
+                <a:ea typeface="Tahoma" pitchFamily="34" charset="-122"/>
+                <a:cs typeface="Tahoma" pitchFamily="34" charset="-120"/>
+              </a:rPr>
+              <a:t>3</a:t>
+            </a:r>
+            <a:endParaRPr lang="en-US" sz="912" dirty="0"/>
+          </a:p>
+        </p:txBody>
+      </p:sp>
+      <p:sp>
+        <p:nvSpPr>
+          <p:cNvPr id="15" name="Text 13"/>
+          <p:cNvSpPr/>
+          <p:nvPr/>
+        </p:nvSpPr>
+        <p:spPr>
+          <a:xfrm>
+            <a:off x="1005840" y="3332226"/>
+            <a:ext cx="4892040" cy="756285"/>
+          </a:xfrm>
+          <a:prstGeom prst="rect">
+            <a:avLst/>
+          </a:prstGeom>
+          <a:noFill/>
+          <a:ln/>
+        </p:spPr>
+        <p:txBody>
+          <a:bodyPr wrap="square" rtlCol="0" anchor="t"/>
+          <a:lstStyle/>
+          <a:p>
+            <a:pPr marL="0" indent="0">
+              <a:buNone/>
+            </a:pPr>
+            <a:r>
+              <a:rPr lang="en-US" sz="1250" dirty="0">
+                <a:solidFill>
+                  <a:srgbClr val="C7CCD9"/>
+                </a:solidFill>
+                <a:latin typeface="Tahoma" pitchFamily="34" charset="0"/>
+                <a:ea typeface="Tahoma" pitchFamily="34" charset="-122"/>
+                <a:cs typeface="Tahoma" pitchFamily="34" charset="-120"/>
+              </a:rPr>
+              <a:t>รอจนติดตั้งเสร็จ แล้วพิมพ์ tsc --version เพื่อตรวจสอบเวอร์ชันที่ติดตั้ง</a:t>
+            </a:r>
+            <a:endParaRPr lang="en-US" sz="1250" dirty="0"/>
+          </a:p>
+        </p:txBody>
+      </p:sp>
+      <p:sp>
+        <p:nvSpPr>
+          <p:cNvPr id="16" name="Shape 14"/>
+          <p:cNvSpPr/>
+          <p:nvPr/>
+        </p:nvSpPr>
+        <p:spPr>
+          <a:xfrm>
+            <a:off x="6263640" y="1783080"/>
+            <a:ext cx="347472" cy="347472"/>
+          </a:xfrm>
+          <a:prstGeom prst="ellipse">
+            <a:avLst/>
+          </a:prstGeom>
+          <a:solidFill>
+            <a:srgbClr val="2FB88F"/>
+          </a:solidFill>
+          <a:ln/>
+        </p:spPr>
+        <p:txBody>
+          <a:bodyPr/>
+          <a:lstStyle/>
+          <a:p>
+            <a:endParaRPr lang="en-US"/>
+          </a:p>
+        </p:txBody>
+      </p:sp>
+      <p:sp>
+        <p:nvSpPr>
+          <p:cNvPr id="17" name="Text 15"/>
+          <p:cNvSpPr/>
+          <p:nvPr/>
+        </p:nvSpPr>
+        <p:spPr>
+          <a:xfrm>
+            <a:off x="6263640" y="1783080"/>
+            <a:ext cx="347472" cy="347472"/>
+          </a:xfrm>
+          <a:prstGeom prst="rect">
+            <a:avLst/>
+          </a:prstGeom>
+          <a:noFill/>
+          <a:ln/>
+        </p:spPr>
+        <p:txBody>
+          <a:bodyPr wrap="square" rtlCol="0" anchor="ctr"/>
+          <a:lstStyle/>
+          <a:p>
+            <a:pPr marL="0" indent="0" algn="ctr">
+              <a:buNone/>
+            </a:pPr>
+            <a:r>
+              <a:rPr lang="en-US" sz="912" b="1" dirty="0">
+                <a:solidFill>
+                  <a:srgbClr val="0B0E14"/>
+                </a:solidFill>
+                <a:latin typeface="Tahoma" pitchFamily="34" charset="0"/>
+                <a:ea typeface="Tahoma" pitchFamily="34" charset="-122"/>
+                <a:cs typeface="Tahoma" pitchFamily="34" charset="-120"/>
+              </a:rPr>
+              <a:t>4</a:t>
+            </a:r>
+            <a:endParaRPr lang="en-US" sz="912" dirty="0"/>
+          </a:p>
+        </p:txBody>
+      </p:sp>
+      <p:sp>
+        <p:nvSpPr>
+          <p:cNvPr id="18" name="Text 16"/>
+          <p:cNvSpPr/>
+          <p:nvPr/>
+        </p:nvSpPr>
+        <p:spPr>
+          <a:xfrm>
+            <a:off x="6720840" y="1728216"/>
+            <a:ext cx="4892040" cy="756285"/>
+          </a:xfrm>
+          <a:prstGeom prst="rect">
+            <a:avLst/>
+          </a:prstGeom>
+          <a:noFill/>
+          <a:ln/>
+        </p:spPr>
+        <p:txBody>
+          <a:bodyPr wrap="square" rtlCol="0" anchor="t"/>
+          <a:lstStyle/>
+          <a:p>
+            <a:pPr marL="0" indent="0">
+              <a:buNone/>
+            </a:pPr>
+            <a:r>
+              <a:rPr lang="en-US" sz="1250" dirty="0">
+                <a:solidFill>
+                  <a:srgbClr val="C7CCD9"/>
+                </a:solidFill>
+                <a:latin typeface="Tahoma" pitchFamily="34" charset="0"/>
+                <a:ea typeface="Tahoma" pitchFamily="34" charset="-122"/>
+                <a:cs typeface="Tahoma" pitchFamily="34" charset="-120"/>
+              </a:rPr>
+              <a:t>สร้างไฟล์ใหม่ชื่อ index.ts แล้วพิมพ์ console.log("Hello TypeScript") ในไฟล์</a:t>
+            </a:r>
+            <a:endParaRPr lang="en-US" sz="1250" dirty="0"/>
+          </a:p>
+        </p:txBody>
+      </p:sp>
+      <p:sp>
+        <p:nvSpPr>
+          <p:cNvPr id="19" name="Shape 17"/>
+          <p:cNvSpPr/>
+          <p:nvPr/>
+        </p:nvSpPr>
+        <p:spPr>
+          <a:xfrm>
+            <a:off x="6263640" y="2585085"/>
+            <a:ext cx="347472" cy="347472"/>
+          </a:xfrm>
+          <a:prstGeom prst="ellipse">
+            <a:avLst/>
+          </a:prstGeom>
+          <a:solidFill>
+            <a:srgbClr val="E8A33D"/>
+          </a:solidFill>
+          <a:ln/>
+        </p:spPr>
+        <p:txBody>
+          <a:bodyPr/>
+          <a:lstStyle/>
+          <a:p>
+            <a:endParaRPr lang="en-US"/>
+          </a:p>
+        </p:txBody>
+      </p:sp>
+      <p:sp>
+        <p:nvSpPr>
+          <p:cNvPr id="20" name="Text 18"/>
+          <p:cNvSpPr/>
+          <p:nvPr/>
+        </p:nvSpPr>
+        <p:spPr>
+          <a:xfrm>
+            <a:off x="6263640" y="2585085"/>
+            <a:ext cx="347472" cy="347472"/>
+          </a:xfrm>
+          <a:prstGeom prst="rect">
+            <a:avLst/>
+          </a:prstGeom>
+          <a:noFill/>
+          <a:ln/>
+        </p:spPr>
+        <p:txBody>
+          <a:bodyPr wrap="square" rtlCol="0" anchor="ctr"/>
+          <a:lstStyle/>
+          <a:p>
+            <a:pPr marL="0" indent="0" algn="ctr">
+              <a:buNone/>
+            </a:pPr>
+            <a:r>
+              <a:rPr lang="en-US" sz="912" b="1" dirty="0">
+                <a:solidFill>
+                  <a:srgbClr val="0B0E14"/>
+                </a:solidFill>
+                <a:latin typeface="Tahoma" pitchFamily="34" charset="0"/>
+                <a:ea typeface="Tahoma" pitchFamily="34" charset="-122"/>
+                <a:cs typeface="Tahoma" pitchFamily="34" charset="-120"/>
+              </a:rPr>
+              <a:t>5</a:t>
+            </a:r>
+            <a:endParaRPr lang="en-US" sz="912" dirty="0"/>
+          </a:p>
+        </p:txBody>
+      </p:sp>
+      <p:sp>
+        <p:nvSpPr>
+          <p:cNvPr id="21" name="Text 19"/>
+          <p:cNvSpPr/>
+          <p:nvPr/>
+        </p:nvSpPr>
+        <p:spPr>
+          <a:xfrm>
+            <a:off x="6720840" y="2530221"/>
+            <a:ext cx="4892040" cy="756285"/>
+          </a:xfrm>
+          <a:prstGeom prst="rect">
+            <a:avLst/>
+          </a:prstGeom>
+          <a:noFill/>
+          <a:ln/>
+        </p:spPr>
+        <p:txBody>
+          <a:bodyPr wrap="square" rtlCol="0" anchor="t"/>
+          <a:lstStyle/>
+          <a:p>
+            <a:pPr marL="0" indent="0">
+              <a:buNone/>
+            </a:pPr>
+            <a:r>
+              <a:rPr lang="en-US" sz="1250" dirty="0">
+                <a:solidFill>
+                  <a:srgbClr val="C7CCD9"/>
+                </a:solidFill>
+                <a:latin typeface="Tahoma" pitchFamily="34" charset="0"/>
+                <a:ea typeface="Tahoma" pitchFamily="34" charset="-122"/>
+                <a:cs typeface="Tahoma" pitchFamily="34" charset="-120"/>
+              </a:rPr>
+              <a:t>บันทึกไฟล์ แล้วพิมพ์คำสั่ง ts-node index.ts ใน Terminal เพื่อรัน</a:t>
+            </a:r>
+            <a:endParaRPr lang="en-US" sz="1250" dirty="0"/>
+          </a:p>
+        </p:txBody>
+      </p:sp>
+      <p:sp>
+        <p:nvSpPr>
+          <p:cNvPr id="22" name="Shape 20"/>
+          <p:cNvSpPr/>
+          <p:nvPr/>
+        </p:nvSpPr>
+        <p:spPr>
+          <a:xfrm>
+            <a:off x="6263640" y="3387090"/>
+            <a:ext cx="347472" cy="347472"/>
+          </a:xfrm>
+          <a:prstGeom prst="ellipse">
+            <a:avLst/>
+          </a:prstGeom>
+          <a:solidFill>
+            <a:srgbClr val="2FB88F"/>
+          </a:solidFill>
+          <a:ln/>
+        </p:spPr>
+        <p:txBody>
+          <a:bodyPr/>
+          <a:lstStyle/>
+          <a:p>
+            <a:endParaRPr lang="en-US"/>
+          </a:p>
+        </p:txBody>
+      </p:sp>
+      <p:sp>
+        <p:nvSpPr>
+          <p:cNvPr id="23" name="Text 21"/>
+          <p:cNvSpPr/>
+          <p:nvPr/>
+        </p:nvSpPr>
+        <p:spPr>
+          <a:xfrm>
+            <a:off x="6263640" y="3387090"/>
+            <a:ext cx="347472" cy="347472"/>
+          </a:xfrm>
+          <a:prstGeom prst="rect">
+            <a:avLst/>
+          </a:prstGeom>
+          <a:noFill/>
+          <a:ln/>
+        </p:spPr>
+        <p:txBody>
+          <a:bodyPr wrap="square" rtlCol="0" anchor="ctr"/>
+          <a:lstStyle/>
+          <a:p>
+            <a:pPr marL="0" indent="0" algn="ctr">
+              <a:buNone/>
+            </a:pPr>
+            <a:r>
+              <a:rPr lang="en-US" sz="912" b="1" dirty="0">
+                <a:solidFill>
+                  <a:srgbClr val="0B0E14"/>
+                </a:solidFill>
+                <a:latin typeface="Tahoma" pitchFamily="34" charset="0"/>
+                <a:ea typeface="Tahoma" pitchFamily="34" charset="-122"/>
+                <a:cs typeface="Tahoma" pitchFamily="34" charset="-120"/>
+              </a:rPr>
+              <a:t>6</a:t>
+            </a:r>
+            <a:endParaRPr lang="en-US" sz="912" dirty="0"/>
+          </a:p>
+        </p:txBody>
+      </p:sp>
+      <p:sp>
+        <p:nvSpPr>
+          <p:cNvPr id="24" name="Text 22"/>
+          <p:cNvSpPr/>
+          <p:nvPr/>
+        </p:nvSpPr>
+        <p:spPr>
+          <a:xfrm>
+            <a:off x="6720840" y="3332226"/>
+            <a:ext cx="4892040" cy="756285"/>
+          </a:xfrm>
+          <a:prstGeom prst="rect">
+            <a:avLst/>
+          </a:prstGeom>
+          <a:noFill/>
+          <a:ln/>
+        </p:spPr>
+        <p:txBody>
+          <a:bodyPr wrap="square" rtlCol="0" anchor="t"/>
+          <a:lstStyle/>
+          <a:p>
+            <a:pPr marL="0" indent="0">
+              <a:buNone/>
+            </a:pPr>
+            <a:r>
+              <a:rPr lang="en-US" sz="1250" dirty="0">
+                <a:solidFill>
+                  <a:srgbClr val="C7CCD9"/>
+                </a:solidFill>
+                <a:latin typeface="Tahoma" pitchFamily="34" charset="0"/>
+                <a:ea typeface="Tahoma" pitchFamily="34" charset="-122"/>
+                <a:cs typeface="Tahoma" pitchFamily="34" charset="-120"/>
+              </a:rPr>
+              <a:t>ถ้าขึ้นข้อความ Hello TypeScript แสดงว่าติดตั้งและใช้งานได้สำเร็จ!</a:t>
+            </a:r>
+            <a:endParaRPr lang="en-US" sz="1250" dirty="0"/>
+          </a:p>
+        </p:txBody>
+      </p:sp>
+      <p:sp>
+        <p:nvSpPr>
+          <p:cNvPr id="25" name="Shape 23"/>
+          <p:cNvSpPr/>
+          <p:nvPr/>
+        </p:nvSpPr>
+        <p:spPr>
+          <a:xfrm>
+            <a:off x="548640" y="4298823"/>
+            <a:ext cx="5349240" cy="1420063"/>
+          </a:xfrm>
+          <a:prstGeom prst="roundRect">
+            <a:avLst>
+              <a:gd name="adj" fmla="val 3863"/>
+            </a:avLst>
+          </a:prstGeom>
+          <a:solidFill>
+            <a:srgbClr val="0F241F"/>
+          </a:solidFill>
+          <a:ln w="12700">
+            <a:solidFill>
+              <a:srgbClr val="2FB88F"/>
+            </a:solidFill>
+            <a:prstDash val="solid"/>
+          </a:ln>
+        </p:spPr>
+        <p:txBody>
+          <a:bodyPr/>
+          <a:lstStyle/>
+          <a:p>
+            <a:endParaRPr lang="en-US"/>
+          </a:p>
+        </p:txBody>
+      </p:sp>
+      <p:sp>
+        <p:nvSpPr>
+          <p:cNvPr id="26" name="Text 24"/>
+          <p:cNvSpPr/>
+          <p:nvPr/>
+        </p:nvSpPr>
+        <p:spPr>
+          <a:xfrm>
+            <a:off x="713232" y="4390263"/>
+            <a:ext cx="5020056" cy="274320"/>
+          </a:xfrm>
+          <a:prstGeom prst="rect">
+            <a:avLst/>
+          </a:prstGeom>
+          <a:noFill/>
+          <a:ln/>
+        </p:spPr>
+        <p:txBody>
+          <a:bodyPr wrap="square" rtlCol="0" anchor="ctr"/>
+          <a:lstStyle/>
+          <a:p>
+            <a:pPr marL="0" indent="0">
+              <a:buNone/>
+            </a:pPr>
+            <a:r>
+              <a:rPr lang="en-US" sz="1200" b="1" dirty="0">
+                <a:solidFill>
+                  <a:srgbClr val="2FB88F"/>
+                </a:solidFill>
+                <a:latin typeface="Tahoma" pitchFamily="34" charset="0"/>
+                <a:ea typeface="Tahoma" pitchFamily="34" charset="-122"/>
+                <a:cs typeface="Tahoma" pitchFamily="34" charset="-120"/>
+              </a:rPr>
+              <a:t>🍎  Mac</a:t>
+            </a:r>
+            <a:endParaRPr lang="en-US" sz="1200" dirty="0"/>
+          </a:p>
+        </p:txBody>
+      </p:sp>
+      <p:sp>
+        <p:nvSpPr>
+          <p:cNvPr id="27" name="Text 25"/>
+          <p:cNvSpPr/>
+          <p:nvPr/>
+        </p:nvSpPr>
+        <p:spPr>
+          <a:xfrm>
+            <a:off x="713232" y="4664583"/>
+            <a:ext cx="5020056" cy="1017727"/>
+          </a:xfrm>
+          <a:prstGeom prst="rect">
+            <a:avLst/>
+          </a:prstGeom>
+          <a:noFill/>
+          <a:ln/>
+        </p:spPr>
+        <p:txBody>
+          <a:bodyPr wrap="square" rtlCol="0" anchor="t"/>
+          <a:lstStyle/>
+          <a:p>
+            <a:pPr marL="0" indent="0">
+              <a:buNone/>
+            </a:pPr>
+            <a:r>
+              <a:rPr lang="en-US" sz="1100" dirty="0">
+                <a:solidFill>
+                  <a:srgbClr val="C7CCD9"/>
+                </a:solidFill>
+                <a:latin typeface="Tahoma" pitchFamily="34" charset="0"/>
+                <a:ea typeface="Tahoma" pitchFamily="34" charset="-122"/>
+                <a:cs typeface="Tahoma" pitchFamily="34" charset="-120"/>
+              </a:rPr>
+              <a:t>เปิด Terminal แล้วใช้คำสั่งชุดเดียวกันได้ทุกคำสั่ง (npm install -g typescript ts-node, tsc --version, ts-node index.ts) เพราะรองรับ Mac ในรูปแบบเดียวกับ Windows</a:t>
+            </a:r>
+            <a:endParaRPr lang="en-US" sz="1100" dirty="0"/>
+          </a:p>
+        </p:txBody>
+      </p:sp>
+      <p:sp>
+        <p:nvSpPr>
+          <p:cNvPr id="28" name="Shape 26"/>
+          <p:cNvSpPr/>
+          <p:nvPr/>
+        </p:nvSpPr>
+        <p:spPr>
+          <a:xfrm>
+            <a:off x="6263640" y="4298823"/>
+            <a:ext cx="5349240" cy="1238098"/>
+          </a:xfrm>
+          <a:prstGeom prst="roundRect">
+            <a:avLst>
+              <a:gd name="adj" fmla="val 4431"/>
+            </a:avLst>
+          </a:prstGeom>
+          <a:solidFill>
+            <a:srgbClr val="2A2013"/>
+          </a:solidFill>
+          <a:ln w="12700">
+            <a:solidFill>
+              <a:srgbClr val="E8A33D"/>
+            </a:solidFill>
+            <a:prstDash val="solid"/>
+          </a:ln>
+        </p:spPr>
+        <p:txBody>
+          <a:bodyPr/>
+          <a:lstStyle/>
+          <a:p>
+            <a:endParaRPr lang="en-US"/>
+          </a:p>
+        </p:txBody>
+      </p:sp>
+      <p:sp>
+        <p:nvSpPr>
+          <p:cNvPr id="29" name="Text 27"/>
+          <p:cNvSpPr/>
+          <p:nvPr/>
+        </p:nvSpPr>
+        <p:spPr>
+          <a:xfrm>
+            <a:off x="6428232" y="4390263"/>
+            <a:ext cx="5020056" cy="274320"/>
+          </a:xfrm>
+          <a:prstGeom prst="rect">
+            <a:avLst/>
+          </a:prstGeom>
+          <a:noFill/>
+          <a:ln/>
+        </p:spPr>
+        <p:txBody>
+          <a:bodyPr wrap="square" rtlCol="0" anchor="ctr"/>
+          <a:lstStyle/>
+          <a:p>
+            <a:pPr marL="0" indent="0">
+              <a:buNone/>
+            </a:pPr>
+            <a:r>
+              <a:rPr lang="en-US" sz="1200" b="1" dirty="0">
+                <a:solidFill>
+                  <a:srgbClr val="E8A33D"/>
+                </a:solidFill>
+                <a:latin typeface="Tahoma" pitchFamily="34" charset="0"/>
+                <a:ea typeface="Tahoma" pitchFamily="34" charset="-122"/>
+                <a:cs typeface="Tahoma" pitchFamily="34" charset="-120"/>
+              </a:rPr>
+              <a:t>💡  เคล็ดลับ</a:t>
+            </a:r>
+            <a:endParaRPr lang="en-US" sz="1200" dirty="0"/>
+          </a:p>
+        </p:txBody>
+      </p:sp>
+      <p:sp>
+        <p:nvSpPr>
+          <p:cNvPr id="30" name="Text 28"/>
+          <p:cNvSpPr/>
+          <p:nvPr/>
+        </p:nvSpPr>
+        <p:spPr>
+          <a:xfrm>
+            <a:off x="6428232" y="4664583"/>
+            <a:ext cx="5020056" cy="835762"/>
+          </a:xfrm>
+          <a:prstGeom prst="rect">
+            <a:avLst/>
+          </a:prstGeom>
+          <a:noFill/>
+          <a:ln/>
+        </p:spPr>
+        <p:txBody>
+          <a:bodyPr wrap="square" rtlCol="0" anchor="t"/>
+          <a:lstStyle/>
+          <a:p>
+            <a:pPr marL="0" indent="0">
+              <a:buNone/>
+            </a:pPr>
+            <a:r>
+              <a:rPr lang="en-US" sz="1100" dirty="0">
+                <a:solidFill>
+                  <a:srgbClr val="C7CCD9"/>
+                </a:solidFill>
+                <a:latin typeface="Tahoma" pitchFamily="34" charset="0"/>
+                <a:ea typeface="Tahoma" pitchFamily="34" charset="-122"/>
+                <a:cs typeface="Tahoma" pitchFamily="34" charset="-120"/>
+              </a:rPr>
+              <a:t>ไม่ต้องสร้างไฟล์ tsconfig.json เอง ts-node รันไฟล์ .ts ได้ตรง ๆ ทันที ไม่ต้อง compile ก่อนแยกขั้นตอน</a:t>
+            </a:r>
+            <a:endParaRPr lang="en-US" sz="1100" dirty="0"/>
+          </a:p>
+        </p:txBody>
+      </p:sp>
+      <p:sp>
+        <p:nvSpPr>
+          <p:cNvPr id="31" name="Text 29"/>
+          <p:cNvSpPr/>
+          <p:nvPr/>
+        </p:nvSpPr>
+        <p:spPr>
+          <a:xfrm>
+            <a:off x="9445752" y="6492240"/>
+            <a:ext cx="2377440" cy="274320"/>
+          </a:xfrm>
+          <a:prstGeom prst="rect">
+            <a:avLst/>
+          </a:prstGeom>
+          <a:noFill/>
+          <a:ln/>
+        </p:spPr>
+        <p:txBody>
+          <a:bodyPr wrap="square" rtlCol="0" anchor="ctr"/>
+          <a:lstStyle/>
+          <a:p>
+            <a:pPr marL="0" indent="0" algn="r">
+              <a:buNone/>
+            </a:pPr>
+            <a:r>
+              <a:rPr lang="en-US" sz="1000" dirty="0">
+                <a:solidFill>
+                  <a:srgbClr val="8B93A7"/>
+                </a:solidFill>
+                <a:latin typeface="Courier New" pitchFamily="34" charset="0"/>
+                <a:ea typeface="Courier New" pitchFamily="34" charset="-122"/>
+                <a:cs typeface="Courier New" pitchFamily="34" charset="-120"/>
+              </a:rPr>
+              <a:t>13</a:t>
+            </a:r>
+            <a:endParaRPr lang="en-US" sz="1000" dirty="0"/>
+          </a:p>
+        </p:txBody>
+      </p:sp>
+    </p:spTree>
+  </p:cSld>
+  <p:clrMapOvr>
+    <a:masterClrMapping/>
+  </p:clrMapOvr>
+  <p:transition spd="slow">
+    <p:push dir="u"/>
+  </p:transition>
+</p:sld>
+</file>
+
+<file path=ppt/slides/slide16.xml><?xml version="1.0" encoding="utf-8"?>
+<p:sld xmlns:a="http://schemas.openxmlformats.org/drawingml/2006/main" xmlns:r="http://schemas.openxmlformats.org/officeDocument/2006/relationships" xmlns:p="http://schemas.openxmlformats.org/presentationml/2006/main">
   <p:cSld name="Slide 13">
     <p:bg>
       <p:bgPr>
@@ -7989,7 +9008,7 @@
                 <a:ea typeface="Tahoma" pitchFamily="34" charset="-122"/>
                 <a:cs typeface="Tahoma" pitchFamily="34" charset="-120"/>
               </a:rPr>
-              <a:t>Variable (ตัวแปร)</a:t>
+              <a:t>Variable &amp; Type (ตัวแปรและชนิดข้อมูล)</a:t>
             </a:r>
             <a:endParaRPr lang="en-US" sz="2300" dirty="0"/>
           </a:p>
@@ -8062,7 +9081,7 @@
                 <a:ea typeface="Courier New" pitchFamily="34" charset="-122"/>
                 <a:cs typeface="Courier New" pitchFamily="34" charset="-120"/>
               </a:rPr>
-              <a:t>10 นาที</a:t>
+              <a:t>18 นาที</a:t>
             </a:r>
             <a:endParaRPr lang="en-US" sz="1050" dirty="0"/>
           </a:p>
@@ -8131,7 +9150,7 @@
                 <a:ea typeface="Courier New" pitchFamily="34" charset="-122"/>
                 <a:cs typeface="Courier New" pitchFamily="34" charset="-120"/>
               </a:rPr>
-              <a:t>ขั้นตอนที่ 4 / 8</a:t>
+              <a:t>ขั้นตอนที่ 5 / 8</a:t>
             </a:r>
             <a:endParaRPr lang="en-US" sz="1100" dirty="0"/>
           </a:p>
@@ -8302,7 +9321,7 @@
                 <a:ea typeface="Tahoma" pitchFamily="34" charset="-122"/>
                 <a:cs typeface="Tahoma" pitchFamily="34" charset="-120"/>
               </a:rPr>
-              <a:t>ใน Node.js ใช้คำว่า let หรือ const นำหน้าชื่อตัวแปร</a:t>
+              <a:t>ใน TypeScript ประกาศชนิดข้อมูลต่อท้ายชื่อตัวแปรด้วย : ตามด้วยชนิด เช่น string, number, boolean</a:t>
             </a:r>
             <a:endParaRPr lang="en-US" sz="1250" dirty="0"/>
           </a:p>
@@ -8368,7 +9387,7 @@
                 <a:ea typeface="Tahoma" pitchFamily="34" charset="-122"/>
                 <a:cs typeface="Tahoma" pitchFamily="34" charset="-120"/>
               </a:rPr>
-              <a:t>let ใช้กับค่าที่เปลี่ยนแปลงได้ / const ใช้กับค่าที่คงที่ไม่เปลี่ยน</a:t>
+              <a:t>let ใช้กับค่าที่เปลี่ยนแปลงได้ (reassign ได้) / const ห้าม reassign แต่ยังแก้ไขค่าข้างในของ array หรือ object ได้</a:t>
             </a:r>
             <a:endParaRPr lang="en-US" sz="1250" dirty="0"/>
           </a:p>
@@ -8434,7 +9453,7 @@
                 <a:ea typeface="Tahoma" pitchFamily="34" charset="-122"/>
                 <a:cs typeface="Tahoma" pitchFamily="34" charset="-120"/>
               </a:rPr>
-              <a:t>ข้อมูลมีหลายชนิด เช่น ตัวเลข (Number) และข้อความ (String)</a:t>
+              <a:t>any ใช้เมื่อยังไม่รู้โครงสร้างข้อมูลชัดเจน (เช่นข้อมูลจาก API) แต่ควรเลี่ยงถ้ารู้ชนิดข้อมูลแล้ว</a:t>
             </a:r>
             <a:endParaRPr lang="en-US" sz="1250" dirty="0"/>
           </a:p>
@@ -8588,7 +9607,7 @@
                 <a:ea typeface="Courier New" pitchFamily="34" charset="-122"/>
                 <a:cs typeface="Courier New" pitchFamily="34" charset="-120"/>
               </a:rPr>
-              <a:t>index.js</a:t>
+              <a:t>index.ts</a:t>
             </a:r>
             <a:endParaRPr lang="en-US" sz="1100" dirty="0"/>
           </a:p>
@@ -8630,7 +9649,7 @@
                 <a:ea typeface="Courier New" pitchFamily="34" charset="-122"/>
                 <a:cs typeface="Courier New" pitchFamily="34" charset="-120"/>
               </a:rPr>
-              <a:t>let name = "Nampueng";</a:t>
+              <a:t>let name: string = "Nampueng";</a:t>
             </a:r>
             <a:endParaRPr lang="en-US" sz="1350" dirty="0"/>
           </a:p>
@@ -8650,7 +9669,7 @@
                 <a:ea typeface="Courier New" pitchFamily="34" charset="-122"/>
                 <a:cs typeface="Courier New" pitchFamily="34" charset="-120"/>
               </a:rPr>
-              <a:t>let age = 12;</a:t>
+              <a:t>let age: number = 12;</a:t>
             </a:r>
             <a:endParaRPr lang="en-US" sz="1350" dirty="0"/>
           </a:p>
@@ -8670,7 +9689,7 @@
                 <a:ea typeface="Courier New" pitchFamily="34" charset="-122"/>
                 <a:cs typeface="Courier New" pitchFamily="34" charset="-120"/>
               </a:rPr>
-              <a:t>const school = "บ้านสวน";</a:t>
+              <a:t>const school: string = "บ้านสวน";</a:t>
             </a:r>
             <a:endParaRPr lang="en-US" sz="1350" dirty="0"/>
           </a:p>
@@ -8699,7 +9718,7 @@
                 <a:ea typeface="Courier New" pitchFamily="34" charset="-122"/>
                 <a:cs typeface="Courier New" pitchFamily="34" charset="-120"/>
               </a:rPr>
-              <a:t>console.log(name);</a:t>
+              <a:t>let scores: number[] = [80, 90, 70];</a:t>
             </a:r>
             <a:endParaRPr lang="en-US" sz="1350" dirty="0"/>
           </a:p>
@@ -8719,7 +9738,7 @@
                 <a:ea typeface="Courier New" pitchFamily="34" charset="-122"/>
                 <a:cs typeface="Courier New" pitchFamily="34" charset="-120"/>
               </a:rPr>
-              <a:t>console.log(age);</a:t>
+              <a:t>let employee: { name: string; age: number } = { name: "Nampueng", age: 12 };</a:t>
             </a:r>
             <a:endParaRPr lang="en-US" sz="1350" dirty="0"/>
           </a:p>
@@ -8739,7 +9758,7 @@
                 <a:ea typeface="Courier New" pitchFamily="34" charset="-122"/>
                 <a:cs typeface="Courier New" pitchFamily="34" charset="-120"/>
               </a:rPr>
-              <a:t>console.log(school);</a:t>
+              <a:t>console.log(name, age, scores, employee);</a:t>
             </a:r>
             <a:endParaRPr lang="en-US" sz="1350" dirty="0"/>
           </a:p>
@@ -8851,7 +9870,7 @@
                 <a:ea typeface="Tahoma" pitchFamily="34" charset="-122"/>
                 <a:cs typeface="Tahoma" pitchFamily="34" charset="-120"/>
               </a:rPr>
-              <a:t>ลองเปลี่ยนชื่อในตัวแปร name เป็นชื่อของตัวเอง แล้วรันดูผลลัพธ์!</a:t>
+              <a:t>ลองใช้ const scores เก็บ array แล้ว .push(...) เพิ่มค่า เทียบกับลองเปลี่ยน scores = [...] ทั้งก้อนดูว่าอันไหน error!</a:t>
             </a:r>
             <a:endParaRPr lang="en-US" sz="1100" dirty="0"/>
           </a:p>
@@ -8890,7 +9909,7 @@
                 <a:ea typeface="Tahoma" pitchFamily="34" charset="-122"/>
                 <a:cs typeface="Tahoma" pitchFamily="34" charset="-120"/>
               </a:rPr>
-              <a:t>วิธีรัน: บันทึกไฟล์ แล้วพิมพ์ node index.js ใน Terminal ของ VS Code (หรือกด ▶ ปุ่ม Code Runner)</a:t>
+              <a:t>วิธีรัน: บันทึกไฟล์ แล้วพิมพ์ ts-node index.ts ใน Terminal ของ VS Code</a:t>
             </a:r>
             <a:endParaRPr lang="en-US" sz="1050" dirty="0"/>
           </a:p>
@@ -8899,1153 +9918,6 @@
       <p:sp>
         <p:nvSpPr>
           <p:cNvPr id="26" name="Text 24"/>
-          <p:cNvSpPr/>
-          <p:nvPr/>
-        </p:nvSpPr>
-        <p:spPr>
-          <a:xfrm>
-            <a:off x="9445752" y="6492240"/>
-            <a:ext cx="2377440" cy="274320"/>
-          </a:xfrm>
-          <a:prstGeom prst="rect">
-            <a:avLst/>
-          </a:prstGeom>
-          <a:noFill/>
-          <a:ln/>
-        </p:spPr>
-        <p:txBody>
-          <a:bodyPr wrap="square" rtlCol="0" anchor="ctr"/>
-          <a:lstStyle/>
-          <a:p>
-            <a:pPr marL="0" indent="0" algn="r">
-              <a:buNone/>
-            </a:pPr>
-            <a:r>
-              <a:rPr lang="en-US" sz="1000" dirty="0">
-                <a:solidFill>
-                  <a:srgbClr val="8B93A7"/>
-                </a:solidFill>
-                <a:latin typeface="Courier New" pitchFamily="34" charset="0"/>
-                <a:ea typeface="Courier New" pitchFamily="34" charset="-122"/>
-                <a:cs typeface="Courier New" pitchFamily="34" charset="-120"/>
-              </a:rPr>
-              <a:t>13</a:t>
-            </a:r>
-            <a:endParaRPr lang="en-US" sz="1000" dirty="0"/>
-          </a:p>
-        </p:txBody>
-      </p:sp>
-    </p:spTree>
-  </p:cSld>
-  <p:clrMapOvr>
-    <a:masterClrMapping/>
-  </p:clrMapOvr>
-  <p:transition spd="slow">
-    <p:push dir="u"/>
-  </p:transition>
-</p:sld>
-</file>
-
-<file path=ppt/slides/slide16.xml><?xml version="1.0" encoding="utf-8"?>
-<p:sld xmlns:a="http://schemas.openxmlformats.org/drawingml/2006/main" xmlns:r="http://schemas.openxmlformats.org/officeDocument/2006/relationships" xmlns:p="http://schemas.openxmlformats.org/presentationml/2006/main">
-  <p:cSld name="Slide 14">
-    <p:bg>
-      <p:bgPr>
-        <a:solidFill>
-          <a:srgbClr val="0B0E14"/>
-        </a:solidFill>
-        <a:effectLst/>
-      </p:bgPr>
-    </p:bg>
-    <p:spTree>
-      <p:nvGrpSpPr>
-        <p:cNvPr id="1" name=""/>
-        <p:cNvGrpSpPr/>
-        <p:nvPr/>
-      </p:nvGrpSpPr>
-      <p:grpSpPr>
-        <a:xfrm>
-          <a:off x="0" y="0"/>
-          <a:ext cx="0" cy="0"/>
-          <a:chOff x="0" y="0"/>
-          <a:chExt cx="0" cy="0"/>
-        </a:xfrm>
-      </p:grpSpPr>
-      <p:sp>
-        <p:nvSpPr>
-          <p:cNvPr id="2" name="Text 0"/>
-          <p:cNvSpPr/>
-          <p:nvPr/>
-        </p:nvSpPr>
-        <p:spPr>
-          <a:xfrm>
-            <a:off x="548640" y="320040"/>
-            <a:ext cx="8778240" cy="502920"/>
-          </a:xfrm>
-          <a:prstGeom prst="rect">
-            <a:avLst/>
-          </a:prstGeom>
-          <a:noFill/>
-          <a:ln/>
-        </p:spPr>
-        <p:txBody>
-          <a:bodyPr wrap="square" rtlCol="0" anchor="ctr"/>
-          <a:lstStyle/>
-          <a:p>
-            <a:pPr marL="0" indent="0">
-              <a:buNone/>
-            </a:pPr>
-            <a:r>
-              <a:rPr lang="en-US" sz="2300" b="1" dirty="0">
-                <a:solidFill>
-                  <a:srgbClr val="FFFFFF"/>
-                </a:solidFill>
-                <a:latin typeface="Tahoma" pitchFamily="34" charset="0"/>
-                <a:ea typeface="Tahoma" pitchFamily="34" charset="-122"/>
-                <a:cs typeface="Tahoma" pitchFamily="34" charset="-120"/>
-              </a:rPr>
-              <a:t>Comparison Operations</a:t>
-            </a:r>
-            <a:endParaRPr lang="en-US" sz="2300" dirty="0"/>
-          </a:p>
-        </p:txBody>
-      </p:sp>
-      <p:sp>
-        <p:nvSpPr>
-          <p:cNvPr id="3" name="Shape 1"/>
-          <p:cNvSpPr/>
-          <p:nvPr/>
-        </p:nvSpPr>
-        <p:spPr>
-          <a:xfrm>
-            <a:off x="10104120" y="365760"/>
-            <a:ext cx="1508760" cy="384048"/>
-          </a:xfrm>
-          <a:prstGeom prst="roundRect">
-            <a:avLst>
-              <a:gd name="adj" fmla="val 50000"/>
-            </a:avLst>
-          </a:prstGeom>
-          <a:solidFill>
-            <a:srgbClr val="E8A33D"/>
-          </a:solidFill>
-          <a:ln w="12700">
-            <a:solidFill>
-              <a:srgbClr val="E8A33D"/>
-            </a:solidFill>
-            <a:prstDash val="solid"/>
-          </a:ln>
-        </p:spPr>
-        <p:txBody>
-          <a:bodyPr/>
-          <a:lstStyle/>
-          <a:p>
-            <a:endParaRPr lang="en-US"/>
-          </a:p>
-        </p:txBody>
-      </p:sp>
-      <p:sp>
-        <p:nvSpPr>
-          <p:cNvPr id="4" name="Text 2"/>
-          <p:cNvSpPr/>
-          <p:nvPr/>
-        </p:nvSpPr>
-        <p:spPr>
-          <a:xfrm>
-            <a:off x="10104120" y="365760"/>
-            <a:ext cx="1508760" cy="384048"/>
-          </a:xfrm>
-          <a:prstGeom prst="rect">
-            <a:avLst/>
-          </a:prstGeom>
-          <a:noFill/>
-          <a:ln/>
-        </p:spPr>
-        <p:txBody>
-          <a:bodyPr wrap="square" rtlCol="0" anchor="ctr"/>
-          <a:lstStyle/>
-          <a:p>
-            <a:pPr marL="0" indent="0" algn="ctr">
-              <a:buNone/>
-            </a:pPr>
-            <a:r>
-              <a:rPr lang="en-US" sz="1050" b="1" kern="0" spc="120" dirty="0">
-                <a:solidFill>
-                  <a:srgbClr val="0B0E14"/>
-                </a:solidFill>
-                <a:latin typeface="Courier New" pitchFamily="34" charset="0"/>
-                <a:ea typeface="Courier New" pitchFamily="34" charset="-122"/>
-                <a:cs typeface="Courier New" pitchFamily="34" charset="-120"/>
-              </a:rPr>
-              <a:t>10 นาที</a:t>
-            </a:r>
-            <a:endParaRPr lang="en-US" sz="1050" dirty="0"/>
-          </a:p>
-        </p:txBody>
-      </p:sp>
-      <p:sp>
-        <p:nvSpPr>
-          <p:cNvPr id="5" name="Shape 3"/>
-          <p:cNvSpPr/>
-          <p:nvPr/>
-        </p:nvSpPr>
-        <p:spPr>
-          <a:xfrm>
-            <a:off x="548640" y="1298448"/>
-            <a:ext cx="11064240" cy="0"/>
-          </a:xfrm>
-          <a:prstGeom prst="line">
-            <a:avLst/>
-          </a:prstGeom>
-          <a:noFill/>
-          <a:ln w="12700">
-            <a:solidFill>
-              <a:srgbClr val="262C3B"/>
-            </a:solidFill>
-            <a:prstDash val="solid"/>
-          </a:ln>
-        </p:spPr>
-        <p:txBody>
-          <a:bodyPr/>
-          <a:lstStyle/>
-          <a:p>
-            <a:endParaRPr lang="en-US"/>
-          </a:p>
-        </p:txBody>
-      </p:sp>
-      <p:sp>
-        <p:nvSpPr>
-          <p:cNvPr id="6" name="Text 4"/>
-          <p:cNvSpPr/>
-          <p:nvPr/>
-        </p:nvSpPr>
-        <p:spPr>
-          <a:xfrm>
-            <a:off x="548640" y="1389888"/>
-            <a:ext cx="5486400" cy="292608"/>
-          </a:xfrm>
-          <a:prstGeom prst="rect">
-            <a:avLst/>
-          </a:prstGeom>
-          <a:noFill/>
-          <a:ln/>
-        </p:spPr>
-        <p:txBody>
-          <a:bodyPr wrap="square" rtlCol="0" anchor="ctr"/>
-          <a:lstStyle/>
-          <a:p>
-            <a:pPr marL="0" indent="0">
-              <a:buNone/>
-            </a:pPr>
-            <a:r>
-              <a:rPr lang="en-US" sz="1100" dirty="0">
-                <a:solidFill>
-                  <a:srgbClr val="8B93A7"/>
-                </a:solidFill>
-                <a:latin typeface="Courier New" pitchFamily="34" charset="0"/>
-                <a:ea typeface="Courier New" pitchFamily="34" charset="-122"/>
-                <a:cs typeface="Courier New" pitchFamily="34" charset="-120"/>
-              </a:rPr>
-              <a:t>ขั้นตอนที่ 5 / 8</a:t>
-            </a:r>
-            <a:endParaRPr lang="en-US" sz="1100" dirty="0"/>
-          </a:p>
-        </p:txBody>
-      </p:sp>
-      <p:sp>
-        <p:nvSpPr>
-          <p:cNvPr id="7" name="Text 5"/>
-          <p:cNvSpPr/>
-          <p:nvPr/>
-        </p:nvSpPr>
-        <p:spPr>
-          <a:xfrm>
-            <a:off x="548640" y="1828800"/>
-            <a:ext cx="5029200" cy="365760"/>
-          </a:xfrm>
-          <a:prstGeom prst="rect">
-            <a:avLst/>
-          </a:prstGeom>
-          <a:noFill/>
-          <a:ln/>
-        </p:spPr>
-        <p:txBody>
-          <a:bodyPr wrap="square" rtlCol="0" anchor="ctr"/>
-          <a:lstStyle/>
-          <a:p>
-            <a:pPr marL="0" indent="0">
-              <a:buNone/>
-            </a:pPr>
-            <a:r>
-              <a:rPr lang="en-US" sz="1400" b="1" dirty="0">
-                <a:solidFill>
-                  <a:srgbClr val="FFFFFF"/>
-                </a:solidFill>
-                <a:latin typeface="Tahoma" pitchFamily="34" charset="0"/>
-                <a:ea typeface="Tahoma" pitchFamily="34" charset="-122"/>
-                <a:cs typeface="Tahoma" pitchFamily="34" charset="-120"/>
-              </a:rPr>
-              <a:t>แนวคิด</a:t>
-            </a:r>
-            <a:endParaRPr lang="en-US" sz="1400" dirty="0"/>
-          </a:p>
-        </p:txBody>
-      </p:sp>
-      <p:sp>
-        <p:nvSpPr>
-          <p:cNvPr id="8" name="Shape 6"/>
-          <p:cNvSpPr/>
-          <p:nvPr/>
-        </p:nvSpPr>
-        <p:spPr>
-          <a:xfrm>
-            <a:off x="594360" y="2286000"/>
-            <a:ext cx="109728" cy="109728"/>
-          </a:xfrm>
-          <a:prstGeom prst="ellipse">
-            <a:avLst/>
-          </a:prstGeom>
-          <a:solidFill>
-            <a:srgbClr val="E8A33D"/>
-          </a:solidFill>
-          <a:ln/>
-        </p:spPr>
-        <p:txBody>
-          <a:bodyPr/>
-          <a:lstStyle/>
-          <a:p>
-            <a:endParaRPr lang="en-US"/>
-          </a:p>
-        </p:txBody>
-      </p:sp>
-      <p:sp>
-        <p:nvSpPr>
-          <p:cNvPr id="9" name="Text 7"/>
-          <p:cNvSpPr/>
-          <p:nvPr/>
-        </p:nvSpPr>
-        <p:spPr>
-          <a:xfrm>
-            <a:off x="868680" y="2139696"/>
-            <a:ext cx="4709160" cy="502920"/>
-          </a:xfrm>
-          <a:prstGeom prst="rect">
-            <a:avLst/>
-          </a:prstGeom>
-          <a:noFill/>
-          <a:ln/>
-        </p:spPr>
-        <p:txBody>
-          <a:bodyPr wrap="square" rtlCol="0" anchor="t"/>
-          <a:lstStyle/>
-          <a:p>
-            <a:pPr marL="0" indent="0">
-              <a:buNone/>
-            </a:pPr>
-            <a:r>
-              <a:rPr lang="en-US" sz="1250" dirty="0">
-                <a:solidFill>
-                  <a:srgbClr val="C7CCD9"/>
-                </a:solidFill>
-                <a:latin typeface="Tahoma" pitchFamily="34" charset="0"/>
-                <a:ea typeface="Tahoma" pitchFamily="34" charset="-122"/>
-                <a:cs typeface="Tahoma" pitchFamily="34" charset="-120"/>
-              </a:rPr>
-              <a:t>ตัวดำเนินการเปรียบเทียบ ใช้เช็คว่าค่าสองค่า "จริง (true)" </a:t>
-            </a:r>
-            <a:r>
-              <a:rPr lang="en-US" sz="1250" dirty="0" err="1">
-                <a:solidFill>
-                  <a:srgbClr val="C7CCD9"/>
-                </a:solidFill>
-                <a:latin typeface="Tahoma" pitchFamily="34" charset="0"/>
-                <a:ea typeface="Tahoma" pitchFamily="34" charset="-122"/>
-                <a:cs typeface="Tahoma" pitchFamily="34" charset="-120"/>
-              </a:rPr>
-              <a:t>หรือ</a:t>
-            </a:r>
-            <a:r>
-              <a:rPr lang="en-US" sz="1250" dirty="0">
-                <a:solidFill>
-                  <a:srgbClr val="C7CCD9"/>
-                </a:solidFill>
-                <a:latin typeface="Tahoma" pitchFamily="34" charset="0"/>
-                <a:ea typeface="Tahoma" pitchFamily="34" charset="-122"/>
-                <a:cs typeface="Tahoma" pitchFamily="34" charset="-120"/>
-              </a:rPr>
-              <a:t> </a:t>
-            </a:r>
-            <a:endParaRPr lang="th-TH" sz="1250" dirty="0">
-              <a:solidFill>
-                <a:srgbClr val="C7CCD9"/>
-              </a:solidFill>
-              <a:latin typeface="Tahoma" pitchFamily="34" charset="0"/>
-              <a:ea typeface="Tahoma" pitchFamily="34" charset="-122"/>
-              <a:cs typeface="Tahoma" pitchFamily="34" charset="-120"/>
-            </a:endParaRPr>
-          </a:p>
-          <a:p>
-            <a:pPr marL="0" indent="0">
-              <a:buNone/>
-            </a:pPr>
-            <a:r>
-              <a:rPr lang="en-US" sz="1250" dirty="0">
-                <a:solidFill>
-                  <a:srgbClr val="C7CCD9"/>
-                </a:solidFill>
-                <a:latin typeface="Tahoma" pitchFamily="34" charset="0"/>
-                <a:ea typeface="Tahoma" pitchFamily="34" charset="-122"/>
-                <a:cs typeface="Tahoma" pitchFamily="34" charset="-120"/>
-              </a:rPr>
-              <a:t>"เท็จ (false)"</a:t>
-            </a:r>
-            <a:endParaRPr lang="en-US" sz="1250" dirty="0"/>
-          </a:p>
-        </p:txBody>
-      </p:sp>
-      <p:sp>
-        <p:nvSpPr>
-          <p:cNvPr id="10" name="Shape 8"/>
-          <p:cNvSpPr/>
-          <p:nvPr/>
-        </p:nvSpPr>
-        <p:spPr>
-          <a:xfrm>
-            <a:off x="594360" y="2852928"/>
-            <a:ext cx="109728" cy="109728"/>
-          </a:xfrm>
-          <a:prstGeom prst="ellipse">
-            <a:avLst/>
-          </a:prstGeom>
-          <a:solidFill>
-            <a:srgbClr val="E8A33D"/>
-          </a:solidFill>
-          <a:ln/>
-        </p:spPr>
-        <p:txBody>
-          <a:bodyPr/>
-          <a:lstStyle/>
-          <a:p>
-            <a:endParaRPr lang="en-US"/>
-          </a:p>
-        </p:txBody>
-      </p:sp>
-      <p:sp>
-        <p:nvSpPr>
-          <p:cNvPr id="11" name="Text 9"/>
-          <p:cNvSpPr/>
-          <p:nvPr/>
-        </p:nvSpPr>
-        <p:spPr>
-          <a:xfrm>
-            <a:off x="868680" y="2706624"/>
-            <a:ext cx="4709160" cy="502920"/>
-          </a:xfrm>
-          <a:prstGeom prst="rect">
-            <a:avLst/>
-          </a:prstGeom>
-          <a:noFill/>
-          <a:ln/>
-        </p:spPr>
-        <p:txBody>
-          <a:bodyPr wrap="square" rtlCol="0" anchor="t"/>
-          <a:lstStyle/>
-          <a:p>
-            <a:pPr marL="0" indent="0">
-              <a:buNone/>
-            </a:pPr>
-            <a:r>
-              <a:rPr lang="en-US" sz="1250" dirty="0">
-                <a:solidFill>
-                  <a:srgbClr val="C7CCD9"/>
-                </a:solidFill>
-                <a:latin typeface="Tahoma" pitchFamily="34" charset="0"/>
-                <a:ea typeface="Tahoma" pitchFamily="34" charset="-122"/>
-                <a:cs typeface="Tahoma" pitchFamily="34" charset="-120"/>
-              </a:rPr>
-              <a:t>==  เท่ากับ      !=  ไม่เท่ากับ</a:t>
-            </a:r>
-            <a:endParaRPr lang="en-US" sz="1250" dirty="0"/>
-          </a:p>
-        </p:txBody>
-      </p:sp>
-      <p:sp>
-        <p:nvSpPr>
-          <p:cNvPr id="12" name="Shape 10"/>
-          <p:cNvSpPr/>
-          <p:nvPr/>
-        </p:nvSpPr>
-        <p:spPr>
-          <a:xfrm>
-            <a:off x="594360" y="3419856"/>
-            <a:ext cx="109728" cy="109728"/>
-          </a:xfrm>
-          <a:prstGeom prst="ellipse">
-            <a:avLst/>
-          </a:prstGeom>
-          <a:solidFill>
-            <a:srgbClr val="E8A33D"/>
-          </a:solidFill>
-          <a:ln/>
-        </p:spPr>
-        <p:txBody>
-          <a:bodyPr/>
-          <a:lstStyle/>
-          <a:p>
-            <a:endParaRPr lang="en-US"/>
-          </a:p>
-        </p:txBody>
-      </p:sp>
-      <p:sp>
-        <p:nvSpPr>
-          <p:cNvPr id="13" name="Text 11"/>
-          <p:cNvSpPr/>
-          <p:nvPr/>
-        </p:nvSpPr>
-        <p:spPr>
-          <a:xfrm>
-            <a:off x="868680" y="3273552"/>
-            <a:ext cx="4709160" cy="502920"/>
-          </a:xfrm>
-          <a:prstGeom prst="rect">
-            <a:avLst/>
-          </a:prstGeom>
-          <a:noFill/>
-          <a:ln/>
-        </p:spPr>
-        <p:txBody>
-          <a:bodyPr wrap="square" rtlCol="0" anchor="t"/>
-          <a:lstStyle/>
-          <a:p>
-            <a:pPr marL="0" indent="0">
-              <a:buNone/>
-            </a:pPr>
-            <a:r>
-              <a:rPr lang="en-US" sz="1250" dirty="0">
-                <a:solidFill>
-                  <a:srgbClr val="C7CCD9"/>
-                </a:solidFill>
-                <a:latin typeface="Tahoma" pitchFamily="34" charset="0"/>
-                <a:ea typeface="Tahoma" pitchFamily="34" charset="-122"/>
-                <a:cs typeface="Tahoma" pitchFamily="34" charset="-120"/>
-              </a:rPr>
-              <a:t>&gt;  มากกว่า        &lt;  น้อยกว่า</a:t>
-            </a:r>
-            <a:endParaRPr lang="en-US" sz="1250" dirty="0"/>
-          </a:p>
-        </p:txBody>
-      </p:sp>
-      <p:sp>
-        <p:nvSpPr>
-          <p:cNvPr id="14" name="Shape 12"/>
-          <p:cNvSpPr/>
-          <p:nvPr/>
-        </p:nvSpPr>
-        <p:spPr>
-          <a:xfrm>
-            <a:off x="594360" y="3986784"/>
-            <a:ext cx="109728" cy="109728"/>
-          </a:xfrm>
-          <a:prstGeom prst="ellipse">
-            <a:avLst/>
-          </a:prstGeom>
-          <a:solidFill>
-            <a:srgbClr val="E8A33D"/>
-          </a:solidFill>
-          <a:ln/>
-        </p:spPr>
-        <p:txBody>
-          <a:bodyPr/>
-          <a:lstStyle/>
-          <a:p>
-            <a:endParaRPr lang="en-US"/>
-          </a:p>
-        </p:txBody>
-      </p:sp>
-      <p:sp>
-        <p:nvSpPr>
-          <p:cNvPr id="15" name="Text 13"/>
-          <p:cNvSpPr/>
-          <p:nvPr/>
-        </p:nvSpPr>
-        <p:spPr>
-          <a:xfrm>
-            <a:off x="868680" y="3840480"/>
-            <a:ext cx="4709160" cy="502920"/>
-          </a:xfrm>
-          <a:prstGeom prst="rect">
-            <a:avLst/>
-          </a:prstGeom>
-          <a:noFill/>
-          <a:ln/>
-        </p:spPr>
-        <p:txBody>
-          <a:bodyPr wrap="square" rtlCol="0" anchor="t"/>
-          <a:lstStyle/>
-          <a:p>
-            <a:pPr marL="0" indent="0">
-              <a:buNone/>
-            </a:pPr>
-            <a:r>
-              <a:rPr lang="en-US" sz="1250" dirty="0">
-                <a:solidFill>
-                  <a:srgbClr val="C7CCD9"/>
-                </a:solidFill>
-                <a:latin typeface="Tahoma" pitchFamily="34" charset="0"/>
-                <a:ea typeface="Tahoma" pitchFamily="34" charset="-122"/>
-                <a:cs typeface="Tahoma" pitchFamily="34" charset="-120"/>
-              </a:rPr>
-              <a:t>&gt;=  มากกว่าหรือเท่ากับ    &lt;=  น้อยกว่าหรือเท่ากับ</a:t>
-            </a:r>
-            <a:endParaRPr lang="en-US" sz="1250" dirty="0"/>
-          </a:p>
-        </p:txBody>
-      </p:sp>
-      <p:sp>
-        <p:nvSpPr>
-          <p:cNvPr id="16" name="Shape 14"/>
-          <p:cNvSpPr/>
-          <p:nvPr/>
-        </p:nvSpPr>
-        <p:spPr>
-          <a:xfrm>
-            <a:off x="594360" y="4553712"/>
-            <a:ext cx="109728" cy="109728"/>
-          </a:xfrm>
-          <a:prstGeom prst="ellipse">
-            <a:avLst/>
-          </a:prstGeom>
-          <a:solidFill>
-            <a:srgbClr val="E8A33D"/>
-          </a:solidFill>
-          <a:ln/>
-        </p:spPr>
-        <p:txBody>
-          <a:bodyPr/>
-          <a:lstStyle/>
-          <a:p>
-            <a:endParaRPr lang="en-US"/>
-          </a:p>
-        </p:txBody>
-      </p:sp>
-      <p:sp>
-        <p:nvSpPr>
-          <p:cNvPr id="17" name="Text 15"/>
-          <p:cNvSpPr/>
-          <p:nvPr/>
-        </p:nvSpPr>
-        <p:spPr>
-          <a:xfrm>
-            <a:off x="868680" y="4407408"/>
-            <a:ext cx="4709160" cy="502920"/>
-          </a:xfrm>
-          <a:prstGeom prst="rect">
-            <a:avLst/>
-          </a:prstGeom>
-          <a:noFill/>
-          <a:ln/>
-        </p:spPr>
-        <p:txBody>
-          <a:bodyPr wrap="square" rtlCol="0" anchor="t"/>
-          <a:lstStyle/>
-          <a:p>
-            <a:pPr marL="0" indent="0">
-              <a:buNone/>
-            </a:pPr>
-            <a:r>
-              <a:rPr lang="en-US" sz="1250" dirty="0">
-                <a:solidFill>
-                  <a:srgbClr val="C7CCD9"/>
-                </a:solidFill>
-                <a:latin typeface="Tahoma" pitchFamily="34" charset="0"/>
-                <a:ea typeface="Tahoma" pitchFamily="34" charset="-122"/>
-                <a:cs typeface="Tahoma" pitchFamily="34" charset="-120"/>
-              </a:rPr>
-              <a:t>ผลลัพธ์ที่ได้จะเป็น true หรือ false เสมอ</a:t>
-            </a:r>
-            <a:endParaRPr lang="en-US" sz="1250" dirty="0"/>
-          </a:p>
-        </p:txBody>
-      </p:sp>
-      <p:sp>
-        <p:nvSpPr>
-          <p:cNvPr id="18" name="Shape 16"/>
-          <p:cNvSpPr/>
-          <p:nvPr/>
-        </p:nvSpPr>
-        <p:spPr>
-          <a:xfrm>
-            <a:off x="5532120" y="1828800"/>
-            <a:ext cx="6080760" cy="3383280"/>
-          </a:xfrm>
-          <a:prstGeom prst="roundRect">
-            <a:avLst>
-              <a:gd name="adj" fmla="val 2162"/>
-            </a:avLst>
-          </a:prstGeom>
-          <a:solidFill>
-            <a:srgbClr val="0D1117"/>
-          </a:solidFill>
-          <a:ln w="12700">
-            <a:solidFill>
-              <a:srgbClr val="262C3B"/>
-            </a:solidFill>
-            <a:prstDash val="solid"/>
-          </a:ln>
-        </p:spPr>
-        <p:txBody>
-          <a:bodyPr/>
-          <a:lstStyle/>
-          <a:p>
-            <a:endParaRPr lang="en-US"/>
-          </a:p>
-        </p:txBody>
-      </p:sp>
-      <p:sp>
-        <p:nvSpPr>
-          <p:cNvPr id="19" name="Shape 17"/>
-          <p:cNvSpPr/>
-          <p:nvPr/>
-        </p:nvSpPr>
-        <p:spPr>
-          <a:xfrm>
-            <a:off x="5760720" y="2011680"/>
-            <a:ext cx="146304" cy="146304"/>
-          </a:xfrm>
-          <a:prstGeom prst="ellipse">
-            <a:avLst/>
-          </a:prstGeom>
-          <a:solidFill>
-            <a:srgbClr val="E05252"/>
-          </a:solidFill>
-          <a:ln/>
-        </p:spPr>
-        <p:txBody>
-          <a:bodyPr/>
-          <a:lstStyle/>
-          <a:p>
-            <a:endParaRPr lang="en-US"/>
-          </a:p>
-        </p:txBody>
-      </p:sp>
-      <p:sp>
-        <p:nvSpPr>
-          <p:cNvPr id="20" name="Shape 18"/>
-          <p:cNvSpPr/>
-          <p:nvPr/>
-        </p:nvSpPr>
-        <p:spPr>
-          <a:xfrm>
-            <a:off x="5989320" y="2011680"/>
-            <a:ext cx="146304" cy="146304"/>
-          </a:xfrm>
-          <a:prstGeom prst="ellipse">
-            <a:avLst/>
-          </a:prstGeom>
-          <a:solidFill>
-            <a:srgbClr val="E8A33D"/>
-          </a:solidFill>
-          <a:ln/>
-        </p:spPr>
-        <p:txBody>
-          <a:bodyPr/>
-          <a:lstStyle/>
-          <a:p>
-            <a:endParaRPr lang="en-US"/>
-          </a:p>
-        </p:txBody>
-      </p:sp>
-      <p:sp>
-        <p:nvSpPr>
-          <p:cNvPr id="21" name="Shape 19"/>
-          <p:cNvSpPr/>
-          <p:nvPr/>
-        </p:nvSpPr>
-        <p:spPr>
-          <a:xfrm>
-            <a:off x="6217920" y="2011680"/>
-            <a:ext cx="146304" cy="146304"/>
-          </a:xfrm>
-          <a:prstGeom prst="ellipse">
-            <a:avLst/>
-          </a:prstGeom>
-          <a:solidFill>
-            <a:srgbClr val="2FB88F"/>
-          </a:solidFill>
-          <a:ln/>
-        </p:spPr>
-        <p:txBody>
-          <a:bodyPr/>
-          <a:lstStyle/>
-          <a:p>
-            <a:endParaRPr lang="en-US"/>
-          </a:p>
-        </p:txBody>
-      </p:sp>
-      <p:sp>
-        <p:nvSpPr>
-          <p:cNvPr id="22" name="Text 20"/>
-          <p:cNvSpPr/>
-          <p:nvPr/>
-        </p:nvSpPr>
-        <p:spPr>
-          <a:xfrm>
-            <a:off x="8961120" y="1920240"/>
-            <a:ext cx="2468880" cy="274320"/>
-          </a:xfrm>
-          <a:prstGeom prst="rect">
-            <a:avLst/>
-          </a:prstGeom>
-          <a:noFill/>
-          <a:ln/>
-        </p:spPr>
-        <p:txBody>
-          <a:bodyPr wrap="square" rtlCol="0" anchor="ctr"/>
-          <a:lstStyle/>
-          <a:p>
-            <a:pPr marL="0" indent="0" algn="r">
-              <a:buNone/>
-            </a:pPr>
-            <a:r>
-              <a:rPr lang="en-US" sz="1100" dirty="0">
-                <a:solidFill>
-                  <a:srgbClr val="5B637A"/>
-                </a:solidFill>
-                <a:latin typeface="Courier New" pitchFamily="34" charset="0"/>
-                <a:ea typeface="Courier New" pitchFamily="34" charset="-122"/>
-                <a:cs typeface="Courier New" pitchFamily="34" charset="-120"/>
-              </a:rPr>
-              <a:t>index.js</a:t>
-            </a:r>
-            <a:endParaRPr lang="en-US" sz="1100" dirty="0"/>
-          </a:p>
-        </p:txBody>
-      </p:sp>
-      <p:sp>
-        <p:nvSpPr>
-          <p:cNvPr id="23" name="Text 21"/>
-          <p:cNvSpPr/>
-          <p:nvPr/>
-        </p:nvSpPr>
-        <p:spPr>
-          <a:xfrm>
-            <a:off x="5806440" y="2377440"/>
-            <a:ext cx="5577840" cy="2697480"/>
-          </a:xfrm>
-          <a:prstGeom prst="rect">
-            <a:avLst/>
-          </a:prstGeom>
-          <a:noFill/>
-          <a:ln/>
-        </p:spPr>
-        <p:txBody>
-          <a:bodyPr wrap="square" rtlCol="0" anchor="t"/>
-          <a:lstStyle/>
-          <a:p>
-            <a:pPr marL="0" indent="0">
-              <a:lnSpc>
-                <a:spcPct val="125000"/>
-              </a:lnSpc>
-              <a:buNone/>
-            </a:pPr>
-            <a:r>
-              <a:rPr lang="en-US" sz="1350" dirty="0">
-                <a:solidFill>
-                  <a:srgbClr val="F2C078"/>
-                </a:solidFill>
-                <a:latin typeface="Courier New" pitchFamily="34" charset="0"/>
-                <a:ea typeface="Courier New" pitchFamily="34" charset="-122"/>
-                <a:cs typeface="Courier New" pitchFamily="34" charset="-120"/>
-              </a:rPr>
-              <a:t>let score = 75;</a:t>
-            </a:r>
-            <a:endParaRPr lang="en-US" sz="1350" dirty="0"/>
-          </a:p>
-          <a:p>
-            <a:pPr marL="0" indent="0">
-              <a:lnSpc>
-                <a:spcPct val="125000"/>
-              </a:lnSpc>
-              <a:buNone/>
-            </a:pPr>
-            <a:endParaRPr lang="en-US" sz="1350" dirty="0"/>
-          </a:p>
-          <a:p>
-            <a:pPr marL="0" indent="0">
-              <a:lnSpc>
-                <a:spcPct val="125000"/>
-              </a:lnSpc>
-              <a:buNone/>
-            </a:pPr>
-            <a:r>
-              <a:rPr lang="en-US" sz="1350" dirty="0">
-                <a:solidFill>
-                  <a:srgbClr val="7EE787"/>
-                </a:solidFill>
-                <a:latin typeface="Courier New" pitchFamily="34" charset="0"/>
-                <a:ea typeface="Courier New" pitchFamily="34" charset="-122"/>
-                <a:cs typeface="Courier New" pitchFamily="34" charset="-120"/>
-              </a:rPr>
-              <a:t>console.log(score &gt; 50);</a:t>
-            </a:r>
-            <a:endParaRPr lang="en-US" sz="1350" dirty="0"/>
-          </a:p>
-          <a:p>
-            <a:pPr marL="0" indent="0">
-              <a:lnSpc>
-                <a:spcPct val="125000"/>
-              </a:lnSpc>
-              <a:buNone/>
-            </a:pPr>
-            <a:r>
-              <a:rPr lang="en-US" sz="1350" dirty="0">
-                <a:solidFill>
-                  <a:srgbClr val="5B637A"/>
-                </a:solidFill>
-                <a:latin typeface="Courier New" pitchFamily="34" charset="0"/>
-                <a:ea typeface="Courier New" pitchFamily="34" charset="-122"/>
-                <a:cs typeface="Courier New" pitchFamily="34" charset="-120"/>
-              </a:rPr>
-              <a:t>// true</a:t>
-            </a:r>
-            <a:endParaRPr lang="en-US" sz="1350" dirty="0"/>
-          </a:p>
-          <a:p>
-            <a:pPr marL="0" indent="0">
-              <a:lnSpc>
-                <a:spcPct val="125000"/>
-              </a:lnSpc>
-              <a:buNone/>
-            </a:pPr>
-            <a:r>
-              <a:rPr lang="en-US" sz="1350" dirty="0">
-                <a:solidFill>
-                  <a:srgbClr val="7EE787"/>
-                </a:solidFill>
-                <a:latin typeface="Courier New" pitchFamily="34" charset="0"/>
-                <a:ea typeface="Courier New" pitchFamily="34" charset="-122"/>
-                <a:cs typeface="Courier New" pitchFamily="34" charset="-120"/>
-              </a:rPr>
-              <a:t>console.log(score == 100);</a:t>
-            </a:r>
-            <a:endParaRPr lang="en-US" sz="1350" dirty="0"/>
-          </a:p>
-          <a:p>
-            <a:pPr marL="0" indent="0">
-              <a:lnSpc>
-                <a:spcPct val="125000"/>
-              </a:lnSpc>
-              <a:buNone/>
-            </a:pPr>
-            <a:r>
-              <a:rPr lang="en-US" sz="1350" dirty="0">
-                <a:solidFill>
-                  <a:srgbClr val="5B637A"/>
-                </a:solidFill>
-                <a:latin typeface="Courier New" pitchFamily="34" charset="0"/>
-                <a:ea typeface="Courier New" pitchFamily="34" charset="-122"/>
-                <a:cs typeface="Courier New" pitchFamily="34" charset="-120"/>
-              </a:rPr>
-              <a:t>// false</a:t>
-            </a:r>
-            <a:endParaRPr lang="en-US" sz="1350" dirty="0"/>
-          </a:p>
-          <a:p>
-            <a:pPr marL="0" indent="0">
-              <a:lnSpc>
-                <a:spcPct val="125000"/>
-              </a:lnSpc>
-              <a:buNone/>
-            </a:pPr>
-            <a:r>
-              <a:rPr lang="en-US" sz="1350" dirty="0">
-                <a:solidFill>
-                  <a:srgbClr val="7EE787"/>
-                </a:solidFill>
-                <a:latin typeface="Courier New" pitchFamily="34" charset="0"/>
-                <a:ea typeface="Courier New" pitchFamily="34" charset="-122"/>
-                <a:cs typeface="Courier New" pitchFamily="34" charset="-120"/>
-              </a:rPr>
-              <a:t>console.log(score &gt;= 75);</a:t>
-            </a:r>
-            <a:endParaRPr lang="en-US" sz="1350" dirty="0"/>
-          </a:p>
-          <a:p>
-            <a:pPr marL="0" indent="0">
-              <a:lnSpc>
-                <a:spcPct val="125000"/>
-              </a:lnSpc>
-              <a:buNone/>
-            </a:pPr>
-            <a:r>
-              <a:rPr lang="en-US" sz="1350" dirty="0">
-                <a:solidFill>
-                  <a:srgbClr val="5B637A"/>
-                </a:solidFill>
-                <a:latin typeface="Courier New" pitchFamily="34" charset="0"/>
-                <a:ea typeface="Courier New" pitchFamily="34" charset="-122"/>
-                <a:cs typeface="Courier New" pitchFamily="34" charset="-120"/>
-              </a:rPr>
-              <a:t>// true</a:t>
-            </a:r>
-            <a:endParaRPr lang="en-US" sz="1350" dirty="0"/>
-          </a:p>
-        </p:txBody>
-      </p:sp>
-      <p:sp>
-        <p:nvSpPr>
-          <p:cNvPr id="24" name="Shape 22"/>
-          <p:cNvSpPr/>
-          <p:nvPr/>
-        </p:nvSpPr>
-        <p:spPr>
-          <a:xfrm>
-            <a:off x="548640" y="5486400"/>
-            <a:ext cx="11064240" cy="694030"/>
-          </a:xfrm>
-          <a:prstGeom prst="roundRect">
-            <a:avLst>
-              <a:gd name="adj" fmla="val 7905"/>
-            </a:avLst>
-          </a:prstGeom>
-          <a:solidFill>
-            <a:srgbClr val="2A2013"/>
-          </a:solidFill>
-          <a:ln w="12700">
-            <a:solidFill>
-              <a:srgbClr val="E8A33D"/>
-            </a:solidFill>
-            <a:prstDash val="solid"/>
-          </a:ln>
-        </p:spPr>
-        <p:txBody>
-          <a:bodyPr/>
-          <a:lstStyle/>
-          <a:p>
-            <a:endParaRPr lang="en-US"/>
-          </a:p>
-        </p:txBody>
-      </p:sp>
-      <p:sp>
-        <p:nvSpPr>
-          <p:cNvPr id="25" name="Text 23"/>
-          <p:cNvSpPr/>
-          <p:nvPr/>
-        </p:nvSpPr>
-        <p:spPr>
-          <a:xfrm>
-            <a:off x="713232" y="5577840"/>
-            <a:ext cx="10735056" cy="274320"/>
-          </a:xfrm>
-          <a:prstGeom prst="rect">
-            <a:avLst/>
-          </a:prstGeom>
-          <a:noFill/>
-          <a:ln/>
-        </p:spPr>
-        <p:txBody>
-          <a:bodyPr wrap="square" rtlCol="0" anchor="ctr"/>
-          <a:lstStyle/>
-          <a:p>
-            <a:pPr marL="0" indent="0">
-              <a:buNone/>
-            </a:pPr>
-            <a:r>
-              <a:rPr lang="en-US" sz="1200" b="1" dirty="0">
-                <a:solidFill>
-                  <a:srgbClr val="E8A33D"/>
-                </a:solidFill>
-                <a:latin typeface="Tahoma" pitchFamily="34" charset="0"/>
-                <a:ea typeface="Tahoma" pitchFamily="34" charset="-122"/>
-                <a:cs typeface="Tahoma" pitchFamily="34" charset="-120"/>
-              </a:rPr>
-              <a:t>💡  เคล็ดลับ</a:t>
-            </a:r>
-            <a:endParaRPr lang="en-US" sz="1200" dirty="0"/>
-          </a:p>
-        </p:txBody>
-      </p:sp>
-      <p:sp>
-        <p:nvSpPr>
-          <p:cNvPr id="26" name="Text 24"/>
-          <p:cNvSpPr/>
-          <p:nvPr/>
-        </p:nvSpPr>
-        <p:spPr>
-          <a:xfrm>
-            <a:off x="713232" y="5852160"/>
-            <a:ext cx="10735056" cy="291694"/>
-          </a:xfrm>
-          <a:prstGeom prst="rect">
-            <a:avLst/>
-          </a:prstGeom>
-          <a:noFill/>
-          <a:ln/>
-        </p:spPr>
-        <p:txBody>
-          <a:bodyPr wrap="square" rtlCol="0" anchor="t"/>
-          <a:lstStyle/>
-          <a:p>
-            <a:pPr marL="0" indent="0">
-              <a:buNone/>
-            </a:pPr>
-            <a:r>
-              <a:rPr lang="en-US" sz="1100" dirty="0">
-                <a:solidFill>
-                  <a:srgbClr val="C7CCD9"/>
-                </a:solidFill>
-                <a:latin typeface="Tahoma" pitchFamily="34" charset="0"/>
-                <a:ea typeface="Tahoma" pitchFamily="34" charset="-122"/>
-                <a:cs typeface="Tahoma" pitchFamily="34" charset="-120"/>
-              </a:rPr>
-              <a:t>ลองเปลี่ยนค่า score เป็นเลขอื่น แล้วเดาก่อนว่าผลลัพธ์จะเป็น true หรือ false</a:t>
-            </a:r>
-            <a:endParaRPr lang="en-US" sz="1100" dirty="0"/>
-          </a:p>
-        </p:txBody>
-      </p:sp>
-      <p:sp>
-        <p:nvSpPr>
-          <p:cNvPr id="27" name="Text 25"/>
-          <p:cNvSpPr/>
-          <p:nvPr/>
-        </p:nvSpPr>
-        <p:spPr>
-          <a:xfrm>
-            <a:off x="548640" y="6263640"/>
-            <a:ext cx="11064240" cy="274320"/>
-          </a:xfrm>
-          <a:prstGeom prst="rect">
-            <a:avLst/>
-          </a:prstGeom>
-          <a:noFill/>
-          <a:ln/>
-        </p:spPr>
-        <p:txBody>
-          <a:bodyPr wrap="square" rtlCol="0" anchor="ctr"/>
-          <a:lstStyle/>
-          <a:p>
-            <a:pPr marL="0" indent="0">
-              <a:buNone/>
-            </a:pPr>
-            <a:r>
-              <a:rPr lang="en-US" sz="1050" i="1" dirty="0">
-                <a:solidFill>
-                  <a:srgbClr val="8B93A7"/>
-                </a:solidFill>
-                <a:latin typeface="Tahoma" pitchFamily="34" charset="0"/>
-                <a:ea typeface="Tahoma" pitchFamily="34" charset="-122"/>
-                <a:cs typeface="Tahoma" pitchFamily="34" charset="-120"/>
-              </a:rPr>
-              <a:t>วิธีรัน: บันทึกไฟล์ แล้วพิมพ์ node index.js ใน Terminal ของ VS Code (หรือกด ▶ ปุ่ม Code Runner)</a:t>
-            </a:r>
-            <a:endParaRPr lang="en-US" sz="1050" dirty="0"/>
-          </a:p>
-        </p:txBody>
-      </p:sp>
-      <p:sp>
-        <p:nvSpPr>
-          <p:cNvPr id="28" name="Text 26"/>
           <p:cNvSpPr/>
           <p:nvPr/>
         </p:nvSpPr>
@@ -10151,7 +10023,7 @@
                 <a:ea typeface="Tahoma" pitchFamily="34" charset="-122"/>
                 <a:cs typeface="Tahoma" pitchFamily="34" charset="-120"/>
               </a:rPr>
-              <a:t>IF ELSE (เงื่อนไข)</a:t>
+              <a:t>If-Else + Comparison (เงื่อนไข)</a:t>
             </a:r>
             <a:endParaRPr lang="en-US" sz="2300" dirty="0"/>
           </a:p>
@@ -10224,7 +10096,7 @@
                 <a:ea typeface="Courier New" pitchFamily="34" charset="-122"/>
                 <a:cs typeface="Courier New" pitchFamily="34" charset="-120"/>
               </a:rPr>
-              <a:t>10 นาที</a:t>
+              <a:t>7 นาที</a:t>
             </a:r>
             <a:endParaRPr lang="en-US" sz="1050" dirty="0"/>
           </a:p>
@@ -10398,7 +10270,7 @@
                 <a:ea typeface="Tahoma" pitchFamily="34" charset="-122"/>
                 <a:cs typeface="Tahoma" pitchFamily="34" charset="-120"/>
               </a:rPr>
-              <a:t>if...else ใช้ตัดสินใจว่าจะให้โปรแกรมทำอะไร ขึ้นอยู่กับเงื่อนไข</a:t>
+              <a:t>if...else ใช้ตัดสินใจว่าจะให้โปรแกรมทำอะไร โดยเช็คเงื่อนไขด้วยตัวดำเนินการเปรียบเทียบ เช่น ==, !=, &gt;, &lt;, &gt;=, &lt;=</a:t>
             </a:r>
             <a:endParaRPr lang="en-US" sz="1250" dirty="0"/>
           </a:p>
@@ -10464,7 +10336,7 @@
                 <a:ea typeface="Tahoma" pitchFamily="34" charset="-122"/>
                 <a:cs typeface="Tahoma" pitchFamily="34" charset="-120"/>
               </a:rPr>
-              <a:t>ถ้าเงื่อนไขใน if เป็นจริง → ทำงานใน { } ของ if</a:t>
+              <a:t>ถ้าเงื่อนไขเป็นจริง (true) → ทำงานใน { } ของ if</a:t>
             </a:r>
             <a:endParaRPr lang="en-US" sz="1250" dirty="0"/>
           </a:p>
@@ -10530,7 +10402,7 @@
                 <a:ea typeface="Tahoma" pitchFamily="34" charset="-122"/>
                 <a:cs typeface="Tahoma" pitchFamily="34" charset="-120"/>
               </a:rPr>
-              <a:t>ถ้าเป็นเท็จ → ข้ามไปทำงานใน { } ของ else แทน</a:t>
+              <a:t>ถ้าเป็นเท็จ (false) → ข้ามไปทำงานใน { } ของ else แทน</a:t>
             </a:r>
             <a:endParaRPr lang="en-US" sz="1250" dirty="0"/>
           </a:p>
@@ -10596,7 +10468,7 @@
                 <a:ea typeface="Tahoma" pitchFamily="34" charset="-122"/>
                 <a:cs typeface="Tahoma" pitchFamily="34" charset="-120"/>
               </a:rPr>
-              <a:t>สามารถใช้ else if เพิ่มได้หลายเงื่อนไขต่อกัน</a:t>
+              <a:t>สังเกตว่า &gt;= ในเงื่อนไขข้างล่างคือตัวดำเนินการเปรียบเทียบ ผลลัพธ์ที่ได้จะเป็น true หรือ false เสมอ</a:t>
             </a:r>
             <a:endParaRPr lang="en-US" sz="1250" dirty="0"/>
           </a:p>
@@ -10750,7 +10622,7 @@
                 <a:ea typeface="Courier New" pitchFamily="34" charset="-122"/>
                 <a:cs typeface="Courier New" pitchFamily="34" charset="-120"/>
               </a:rPr>
-              <a:t>index.js</a:t>
+              <a:t>index.ts</a:t>
             </a:r>
             <a:endParaRPr lang="en-US" sz="1100" dirty="0"/>
           </a:p>
@@ -10792,7 +10664,7 @@
                 <a:ea typeface="Courier New" pitchFamily="34" charset="-122"/>
                 <a:cs typeface="Courier New" pitchFamily="34" charset="-120"/>
               </a:rPr>
-              <a:t>let score = 75;</a:t>
+              <a:t>let score: number = 75;</a:t>
             </a:r>
             <a:endParaRPr lang="en-US" sz="1350" dirty="0"/>
           </a:p>
@@ -11053,7 +10925,7 @@
                 <a:ea typeface="Tahoma" pitchFamily="34" charset="-122"/>
                 <a:cs typeface="Tahoma" pitchFamily="34" charset="-120"/>
               </a:rPr>
-              <a:t>ลองปรับค่า score ให้ผ่านเงื่อนไขแต่ละแบบ เพื่อดูว่าเกรดที่ได้เปลี่ยนไปอย่างไร</a:t>
+              <a:t>ลองเปลี่ยนตัวดำเนินการเปรียบเทียบ (เช่น &gt; เป็น &gt;=) หรือปรับค่า score ดูว่าเกรดที่ได้เปลี่ยนไปอย่างไร</a:t>
             </a:r>
             <a:endParaRPr lang="en-US" sz="1100" dirty="0"/>
           </a:p>
@@ -11092,7 +10964,7 @@
                 <a:ea typeface="Tahoma" pitchFamily="34" charset="-122"/>
                 <a:cs typeface="Tahoma" pitchFamily="34" charset="-120"/>
               </a:rPr>
-              <a:t>วิธีรัน: บันทึกไฟล์ แล้วพิมพ์ node index.js ใน Terminal ของ VS Code (หรือกด ▶ ปุ่ม Code Runner)</a:t>
+              <a:t>วิธีรัน: บันทึกไฟล์ แล้วพิมพ์ ts-node index.ts ใน Terminal ของ VS Code</a:t>
             </a:r>
             <a:endParaRPr lang="en-US" sz="1050" dirty="0"/>
           </a:p>
@@ -11206,7 +11078,7 @@
                 <a:ea typeface="Tahoma" pitchFamily="34" charset="-122"/>
                 <a:cs typeface="Tahoma" pitchFamily="34" charset="-120"/>
               </a:rPr>
-              <a:t>Loop (For loop)</a:t>
+              <a:t>Loop + Array (วนซ้ำผ่าน Array)</a:t>
             </a:r>
             <a:endParaRPr lang="en-US" sz="2300" dirty="0"/>
           </a:p>
@@ -11279,7 +11151,7 @@
                 <a:ea typeface="Courier New" pitchFamily="34" charset="-122"/>
                 <a:cs typeface="Courier New" pitchFamily="34" charset="-120"/>
               </a:rPr>
-              <a:t>10 นาที</a:t>
+              <a:t>7 นาที</a:t>
             </a:r>
             <a:endParaRPr lang="en-US" sz="1050" dirty="0"/>
           </a:p>
@@ -11585,7 +11457,7 @@
                 <a:ea typeface="Tahoma" pitchFamily="34" charset="-122"/>
                 <a:cs typeface="Tahoma" pitchFamily="34" charset="-120"/>
               </a:rPr>
-              <a:t>i เป็นตัวแปรนับรอบ เริ่มจาก 0 แล้วเพิ่มทีละ 1 (i++)</a:t>
+              <a:t>ใช้ loop วนอ่านค่าทีละตัวใน array ได้ เช่น scores[i] เพื่อดึงค่าตามตำแหน่ง i</a:t>
             </a:r>
             <a:endParaRPr lang="en-US" sz="1250" dirty="0"/>
           </a:p>
@@ -11805,7 +11677,7 @@
                 <a:ea typeface="Courier New" pitchFamily="34" charset="-122"/>
                 <a:cs typeface="Courier New" pitchFamily="34" charset="-120"/>
               </a:rPr>
-              <a:t>index.js</a:t>
+              <a:t>index.ts</a:t>
             </a:r>
             <a:endParaRPr lang="en-US" sz="1100" dirty="0"/>
           </a:p>
@@ -11847,7 +11719,7 @@
                 <a:ea typeface="Courier New" pitchFamily="34" charset="-122"/>
                 <a:cs typeface="Courier New" pitchFamily="34" charset="-120"/>
               </a:rPr>
-              <a:t>for (let i = 1; i &lt;= 5; i++) {</a:t>
+              <a:t>let scores: number[] = [95, 82, 67, 55, 40];</a:t>
             </a:r>
             <a:endParaRPr lang="en-US" sz="1350" dirty="0"/>
           </a:p>
@@ -11867,7 +11739,7 @@
                 <a:ea typeface="Courier New" pitchFamily="34" charset="-122"/>
                 <a:cs typeface="Courier New" pitchFamily="34" charset="-120"/>
               </a:rPr>
-              <a:t>  console.log("รอบที่ " + i);</a:t>
+              <a:t>for (let i = 0; i &lt; scores.length; i++) {</a:t>
             </a:r>
             <a:endParaRPr lang="en-US" sz="1350" dirty="0"/>
           </a:p>
@@ -11887,7 +11759,7 @@
                 <a:ea typeface="Courier New" pitchFamily="34" charset="-122"/>
                 <a:cs typeface="Courier New" pitchFamily="34" charset="-120"/>
               </a:rPr>
-              <a:t>}</a:t>
+              <a:t>  console.log(scores[i]);</a:t>
             </a:r>
             <a:endParaRPr lang="en-US" sz="1350" dirty="0"/>
           </a:p>
@@ -11916,7 +11788,7 @@
                 <a:ea typeface="Courier New" pitchFamily="34" charset="-122"/>
                 <a:cs typeface="Courier New" pitchFamily="34" charset="-120"/>
               </a:rPr>
-              <a:t>// ผลลัพธ์:</a:t>
+              <a:t>}</a:t>
             </a:r>
             <a:endParaRPr lang="en-US" sz="1350" dirty="0"/>
           </a:p>
@@ -11936,7 +11808,7 @@
                 <a:ea typeface="Courier New" pitchFamily="34" charset="-122"/>
                 <a:cs typeface="Courier New" pitchFamily="34" charset="-120"/>
               </a:rPr>
-              <a:t>// รอบที่ 1</a:t>
+              <a:t>// ผลลัพธ์: 95, 82, 67, 55, 40</a:t>
             </a:r>
             <a:endParaRPr lang="en-US" sz="1350" dirty="0"/>
           </a:p>
@@ -11956,7 +11828,7 @@
                 <a:ea typeface="Courier New" pitchFamily="34" charset="-122"/>
                 <a:cs typeface="Courier New" pitchFamily="34" charset="-120"/>
               </a:rPr>
-              <a:t>// รอบที่ 2 ... รอบที่ 5</a:t>
+              <a:t>// (พิมพ์ทีละบรรทัด)</a:t>
             </a:r>
             <a:endParaRPr lang="en-US" sz="1350" dirty="0"/>
           </a:p>
@@ -12068,7 +11940,7 @@
                 <a:ea typeface="Tahoma" pitchFamily="34" charset="-122"/>
                 <a:cs typeface="Tahoma" pitchFamily="34" charset="-120"/>
               </a:rPr>
-              <a:t>ลองเปลี่ยนเลข 5 เป็นเลขอื่น แล้วสังเกตว่าโปรแกรมพิมพ์กี่รอบ</a:t>
+              <a:t>ลองเพิ่มตัวเลขใน array scores แล้วสังเกตว่า loop พิมพ์ครบทุกตัวโดยไม่ต้องแก้เงื่อนไขเอง (เพราะใช้ scores.length)</a:t>
             </a:r>
             <a:endParaRPr lang="en-US" sz="1100" dirty="0"/>
           </a:p>
@@ -12107,7 +11979,7 @@
                 <a:ea typeface="Tahoma" pitchFamily="34" charset="-122"/>
                 <a:cs typeface="Tahoma" pitchFamily="34" charset="-120"/>
               </a:rPr>
-              <a:t>วิธีรัน: บันทึกไฟล์ แล้วพิมพ์ node index.js ใน Terminal ของ VS Code (หรือกด ▶ ปุ่ม Code Runner)</a:t>
+              <a:t>วิธีรัน: บันทึกไฟล์ แล้วพิมพ์ ts-node index.ts ใน Terminal ของ VS Code</a:t>
             </a:r>
             <a:endParaRPr lang="en-US" sz="1050" dirty="0"/>
           </a:p>
@@ -12475,7 +12347,7 @@
                 <a:ea typeface="Tahoma" pitchFamily="34" charset="-122"/>
                 <a:cs typeface="Tahoma" pitchFamily="34" charset="-120"/>
               </a:rPr>
-              <a:t>ให้นักศึกษาเขียนโปรแกรมด้วย Node.js </a:t>
+              <a:t>ให้นักศึกษาเขียนโปรแกรมด้วย TypeScript </a:t>
             </a:r>
             <a:r>
               <a:rPr lang="en-US" sz="1100" dirty="0" err="1">
@@ -12630,7 +12502,7 @@
                 <a:ea typeface="Tahoma" pitchFamily="34" charset="-122"/>
                 <a:cs typeface="Tahoma" pitchFamily="34" charset="-120"/>
               </a:rPr>
-              <a:t>กำหนดตัวแปร scores เก็บคะแนนสอบของนักศึกษา 5 </a:t>
+              <a:t>กำหนดตัวแปร scores: number[] เก็บคะแนนสอบของนักศึกษา 5 </a:t>
             </a:r>
             <a:r>
               <a:rPr lang="en-US" sz="1200" dirty="0" err="1">
@@ -13441,7 +13313,7 @@
                 <a:ea typeface="Tahoma" pitchFamily="34" charset="-122"/>
                 <a:cs typeface="Tahoma" pitchFamily="34" charset="-120"/>
               </a:rPr>
-              <a:t>ส่งงาน: บันทึกไฟล์ชื่อ grade.js แล้วส่งผ่านช่องทางที่กำหนด</a:t>
+              <a:t>ส่งงาน: บันทึกไฟล์ชื่อ grade.ts แล้วรันด้วย ts-node grade.ts ก่อนส่งผ่านช่องทางที่กำหนด</a:t>
             </a:r>
             <a:endParaRPr lang="en-US" sz="1050" dirty="0"/>
           </a:p>
@@ -13777,7 +13649,7 @@
                     <a:ea typeface="Tahoma" pitchFamily="34" charset="-122"/>
                     <a:cs typeface="Tahoma" pitchFamily="34" charset="-120"/>
                   </a:rPr>
-                  <a:t>Technical  Project Manager at Fujitsu Thailand</a:t>
+                  <a:t>Technical Project Manager at Fujitsu Thailand</a:t>
                 </a:r>
                 <a:endParaRPr lang="en-US" sz="1500" dirty="0"/>
               </a:p>
@@ -22941,7 +22813,7 @@
                 <a:ea typeface="Tahoma" pitchFamily="34" charset="-122"/>
                 <a:cs typeface="Tahoma" pitchFamily="34" charset="-120"/>
               </a:rPr>
-              <a:t>Programming for Fun (Node.js)</a:t>
+              <a:t>Programming for Fun (TypeScript)</a:t>
             </a:r>
             <a:endParaRPr lang="en-US" sz="1800" dirty="0"/>
           </a:p>
